--- a/library/b04-markdown/b04-markdown.pptx
+++ b/library/b04-markdown/b04-markdown.pptx
@@ -8,8 +8,8 @@
     <p:notesMasterId r:id="rId21"/>
   </p:notesMasterIdLst>
   <p:sldIdLst>
+    <p:sldId id="274" r:id="rId12"/>
     <p:sldId id="275" r:id="rId26"/>
-    <p:sldId id="276" r:id="rId27"/>
     <p:sldId id="256" r:id="rId2"/>
     <p:sldId id="257" r:id="rId3"/>
     <p:sldId id="258" r:id="rId4"/>
@@ -20,7 +20,6 @@
     <p:sldId id="263" r:id="rId9"/>
     <p:sldId id="264" r:id="rId10"/>
     <p:sldId id="265" r:id="rId11"/>
-    <p:sldId id="274" r:id="rId12"/>
     <p:sldId id="266" r:id="rId13"/>
     <p:sldId id="267" r:id="rId14"/>
     <p:sldId id="268" r:id="rId15"/>
@@ -29,7 +28,7 @@
     <p:sldId id="271" r:id="rId18"/>
     <p:sldId id="272" r:id="rId19"/>
     <p:sldId id="273" r:id="rId20"/>
-    <p:sldId id="277" r:id="rId28"/>
+    <p:sldId id="276" r:id="rId27"/>
   </p:sldIdLst>
   <p:sldSz cx="12192000" cy="6858000"/>
   <p:notesSz cx="6858000" cy="12192000"/>
@@ -417,114 +416,6 @@
     <p:extLst>
       <p:ext uri="{BB962C8B-B14F-4D97-AF65-F5344CB8AC3E}">
         <p14:creationId xmlns:p14="http://schemas.microsoft.com/office/powerpoint/2010/main" val="1024086991"/>
-      </p:ext>
-    </p:extLst>
-  </p:cSld>
-  <p:clrMapOvr>
-    <a:masterClrMapping/>
-  </p:clrMapOvr>
-</p:notes>
-</file>
-
-<file path=ppt/notesSlides/notesSlide11.xml><?xml version="1.0" encoding="utf-8"?>
-<p:notes xmlns:a="http://schemas.openxmlformats.org/drawingml/2006/main" xmlns:r="http://schemas.openxmlformats.org/officeDocument/2006/relationships" xmlns:p="http://schemas.openxmlformats.org/presentationml/2006/main">
-  <p:cSld>
-    <p:spTree>
-      <p:nvGrpSpPr>
-        <p:cNvPr id="1" name="">
-          <a:extLst>
-            <a:ext uri="{FF2B5EF4-FFF2-40B4-BE49-F238E27FC236}">
-              <a16:creationId xmlns:a16="http://schemas.microsoft.com/office/drawing/2014/main" id="{6BFAD0BA-6042-8D0F-EF3A-E93A943E13DA}"/>
-            </a:ext>
-          </a:extLst>
-        </p:cNvPr>
-        <p:cNvGrpSpPr/>
-        <p:nvPr/>
-      </p:nvGrpSpPr>
-      <p:grpSpPr>
-        <a:xfrm>
-          <a:off x="0" y="0"/>
-          <a:ext cx="0" cy="0"/>
-          <a:chOff x="0" y="0"/>
-          <a:chExt cx="0" cy="0"/>
-        </a:xfrm>
-      </p:grpSpPr>
-      <p:sp>
-        <p:nvSpPr>
-          <p:cNvPr id="2" name="Slide Image Placeholder 1">
-            <a:extLst>
-              <a:ext uri="{FF2B5EF4-FFF2-40B4-BE49-F238E27FC236}">
-                <a16:creationId xmlns:a16="http://schemas.microsoft.com/office/drawing/2014/main" id="{5414A3D9-226C-8E78-7AD8-7AF94D70B068}"/>
-              </a:ext>
-            </a:extLst>
-          </p:cNvPr>
-          <p:cNvSpPr>
-            <a:spLocks noGrp="1" noRot="1" noChangeAspect="1"/>
-          </p:cNvSpPr>
-          <p:nvPr>
-            <p:ph type="sldImg"/>
-          </p:nvPr>
-        </p:nvSpPr>
-        <p:spPr/>
-      </p:sp>
-      <p:sp>
-        <p:nvSpPr>
-          <p:cNvPr id="3" name="Notes Placeholder 2">
-            <a:extLst>
-              <a:ext uri="{FF2B5EF4-FFF2-40B4-BE49-F238E27FC236}">
-                <a16:creationId xmlns:a16="http://schemas.microsoft.com/office/drawing/2014/main" id="{6E93E8B3-701F-B2CE-AD76-EB9B56E8BC4B}"/>
-              </a:ext>
-            </a:extLst>
-          </p:cNvPr>
-          <p:cNvSpPr>
-            <a:spLocks noGrp="1"/>
-          </p:cNvSpPr>
-          <p:nvPr>
-            <p:ph type="body" idx="1"/>
-          </p:nvPr>
-        </p:nvSpPr>
-        <p:spPr/>
-        <p:txBody>
-          <a:bodyPr/>
-          <a:lstStyle/>
-          <a:p>
-            <a:endParaRPr lang="en-US" dirty="0"/>
-          </a:p>
-        </p:txBody>
-      </p:sp>
-      <p:sp>
-        <p:nvSpPr>
-          <p:cNvPr id="4" name="Slide Number Placeholder 3">
-            <a:extLst>
-              <a:ext uri="{FF2B5EF4-FFF2-40B4-BE49-F238E27FC236}">
-                <a16:creationId xmlns:a16="http://schemas.microsoft.com/office/drawing/2014/main" id="{609EE1EB-4897-04EE-D77C-CEAE223E7513}"/>
-              </a:ext>
-            </a:extLst>
-          </p:cNvPr>
-          <p:cNvSpPr>
-            <a:spLocks noGrp="1"/>
-          </p:cNvSpPr>
-          <p:nvPr>
-            <p:ph type="sldNum" sz="quarter" idx="10"/>
-          </p:nvPr>
-        </p:nvSpPr>
-        <p:spPr/>
-        <p:txBody>
-          <a:bodyPr/>
-          <a:lstStyle/>
-          <a:p>
-            <a:fld id="{F7021451-1387-4CA6-816F-3879F97B5CBC}" type="slidenum">
-              <a:rPr lang="en-US"/>
-              <a:t>11</a:t>
-            </a:fld>
-            <a:endParaRPr lang="en-US"/>
-          </a:p>
-        </p:txBody>
-      </p:sp>
-    </p:spTree>
-    <p:extLst>
-      <p:ext uri="{BB962C8B-B14F-4D97-AF65-F5344CB8AC3E}">
-        <p14:creationId xmlns:p14="http://schemas.microsoft.com/office/powerpoint/2010/main" val="2693692908"/>
       </p:ext>
     </p:extLst>
   </p:cSld>
@@ -2758,77 +2649,6 @@
       </p:sp>
       <p:sp>
         <p:nvSpPr>
-          <p:cNvPr id="17" name="Shape 15"/>
-          <p:cNvSpPr/>
-          <p:nvPr/>
-        </p:nvSpPr>
-        <p:spPr>
-          <a:xfrm>
-            <a:off x="665683" y="665683"/>
-            <a:ext cx="1733702" cy="323698"/>
-          </a:xfrm>
-          <a:prstGeom prst="roundRect">
-            <a:avLst>
-              <a:gd name="adj" fmla="val 282486"/>
-            </a:avLst>
-          </a:prstGeom>
-          <a:noFill/>
-          <a:ln w="12700">
-            <a:solidFill>
-              <a:srgbClr val="E5E7EB"/>
-            </a:solidFill>
-            <a:prstDash val="solid"/>
-          </a:ln>
-        </p:spPr>
-        <p:txBody>
-          <a:bodyPr/>
-          <a:lstStyle/>
-          <a:p>
-            <a:endParaRPr lang="ko-KR" altLang="en-US"/>
-          </a:p>
-        </p:txBody>
-      </p:sp>
-      <p:sp>
-        <p:nvSpPr>
-          <p:cNvPr id="18" name="Text 16"/>
-          <p:cNvSpPr txBox="1"/>
-          <p:nvPr/>
-        </p:nvSpPr>
-        <p:spPr>
-          <a:xfrm>
-            <a:off x="802843" y="732434"/>
-            <a:ext cx="1459382" cy="191110"/>
-          </a:xfrm>
-          <a:prstGeom prst="rect">
-            <a:avLst/>
-          </a:prstGeom>
-          <a:noFill/>
-          <a:ln/>
-        </p:spPr>
-        <p:txBody>
-          <a:bodyPr wrap="square" lIns="0" tIns="0" rIns="0" bIns="0" rtlCol="0" anchor="ctr"/>
-          <a:lstStyle/>
-          <a:p>
-            <a:pPr marL="0" indent="0" algn="ctr">
-              <a:buNone/>
-            </a:pPr>
-            <a:r>
-              <a:rPr lang="en-US" sz="1000" b="1" dirty="0">
-                <a:solidFill>
-                  <a:srgbClr val="93C5FD"/>
-                </a:solidFill>
-                <a:latin typeface="Noto Sans KR" pitchFamily="34" charset="0"/>
-                <a:ea typeface="Noto Sans KR" pitchFamily="34" charset="-122"/>
-                <a:cs typeface="Noto Sans KR" pitchFamily="34" charset="-120"/>
-              </a:rPr>
-              <a:t>Video Course 2026</a:t>
-            </a:r>
-            <a:endParaRPr lang="en-US" sz="1000" dirty="0"/>
-          </a:p>
-        </p:txBody>
-      </p:sp>
-      <p:sp>
-        <p:nvSpPr>
           <p:cNvPr id="19" name="Text 17"/>
           <p:cNvSpPr txBox="1"/>
           <p:nvPr/>
@@ -3427,7 +3247,7 @@
                   <a:latin typeface="Noto Sans KR" pitchFamily="34" charset="0"/>
                   <a:ea typeface="Noto Sans KR" pitchFamily="34" charset="-122"/>
                 </a:rPr>
-                <a:t>이 애 본</a:t>
+                <a:t>이애본</a:t>
               </a:r>
               <a:br>
                 <a:rPr lang="en-US" altLang="ko-KR" sz="1500" b="1" dirty="0">
@@ -3446,7 +3266,7 @@
                   <a:latin typeface="Noto Sans KR" pitchFamily="34" charset="0"/>
                   <a:ea typeface="Noto Sans KR" pitchFamily="34" charset="-122"/>
                 </a:rPr>
-                <a:t>한신대학교 </a:t>
+                <a:t>드림아이티비즈(DreamIT Biz)</a:t>
               </a:r>
               <a:r>
                 <a:rPr lang="en-US" altLang="ko-KR" sz="1500" b="1" dirty="0">
@@ -3456,9 +3276,9 @@
                   <a:latin typeface="Noto Sans KR" pitchFamily="34" charset="0"/>
                   <a:ea typeface="Noto Sans KR" pitchFamily="34" charset="-122"/>
                 </a:rPr>
-                <a:t>AI.SW</a:t>
+                <a:t/>
               </a:r>
-              <a:r>
+              <a:br>
                 <a:rPr lang="ko-KR" altLang="en-US" sz="1500" b="1" dirty="0">
                   <a:solidFill>
                     <a:srgbClr val="FFFFFF"/>
@@ -3466,8 +3286,7 @@
                   <a:latin typeface="Noto Sans KR" pitchFamily="34" charset="0"/>
                   <a:ea typeface="Noto Sans KR" pitchFamily="34" charset="-122"/>
                 </a:rPr>
-                <a:t>대학 </a:t>
-              </a:r>
+              </a:br>
               <a:r>
                 <a:rPr lang="en-US" altLang="ko-KR" sz="1500" b="1" dirty="0">
                   <a:solidFill>
@@ -3477,7 +3296,7 @@
                   <a:ea typeface="Noto Sans KR" pitchFamily="34" charset="-122"/>
                   <a:hlinkClick r:id="rId4"/>
                 </a:rPr>
-                <a:t>aebon@hs.ac.kr</a:t>
+                <a:t>aebon@dreamitbiz.com</a:t>
               </a:r>
               <a:r>
                 <a:rPr lang="ko-KR" altLang="en-US" sz="1500" b="1" dirty="0">
@@ -3534,7 +3353,7 @@
                 </a:solidFill>
                 <a:latin typeface="Pretendard"/>
               </a:rPr>
-              <a:t>© 2026 이애본(드림아이티비즈) · useful-ai.dreamitbiz.com · 교육 목적 비영리 이용 · 출처 표기</a:t>
+              <a:t>© 2026 이애본 · 홍문원(洪文院) 발행 · CC BY-NC-ND 4.0 · useful-ai.dreamitbiz.com</a:t>
             </a:r>
           </a:p>
         </p:txBody>
@@ -3990,7 +3809,7 @@
                 <a:ea typeface="Noto Sans KR" pitchFamily="34" charset="-122"/>
                 <a:cs typeface="Noto Sans KR" pitchFamily="34" charset="-120"/>
               </a:rPr>
-              <a:t>강사가 문서의 뼈대를 잡고 링크와 이미지를 추가하는 전체 과정을 시연합니다.</a:t>
+              <a:t>문서의 뼈대를 잡고 링크와 이미지를 추가하는 전체 과정을 예시로 봅니다.</a:t>
             </a:r>
             <a:endParaRPr lang="en-US" sz="1500" dirty="0"/>
           </a:p>
@@ -4571,7 +4390,7 @@
                 <a:ea typeface="Menlo" pitchFamily="34" charset="-122"/>
                 <a:cs typeface="Menlo" pitchFamily="34" charset="-120"/>
               </a:rPr>
-              <a:t>-</a:t>
+              <a:t>- </a:t>
             </a:r>
             <a:r>
               <a:rPr lang="en-US" sz="1200" dirty="0">
@@ -4621,7 +4440,7 @@
                 <a:ea typeface="Menlo" pitchFamily="34" charset="-122"/>
                 <a:cs typeface="Menlo" pitchFamily="34" charset="-120"/>
               </a:rPr>
-              <a:t>-</a:t>
+              <a:t>- </a:t>
             </a:r>
             <a:r>
               <a:rPr lang="en-US" sz="1200" dirty="0">
@@ -4710,7 +4529,7 @@
                 <a:ea typeface="Menlo" pitchFamily="34" charset="-122"/>
                 <a:cs typeface="Menlo" pitchFamily="34" charset="-120"/>
               </a:rPr>
-              <a:t>1.</a:t>
+              <a:t>1. **도서관 관리 시스템** </a:t>
             </a:r>
             <a:r>
               <a:rPr lang="en-US" sz="1200" b="1" dirty="0">
@@ -4721,7 +4540,7 @@
                 <a:ea typeface="Menlo" pitchFamily="34" charset="-122"/>
                 <a:cs typeface="Menlo" pitchFamily="34" charset="-120"/>
               </a:rPr>
-              <a:t>**도서관 관리 시스템**</a:t>
+              <a:t/>
             </a:r>
             <a:r>
               <a:rPr lang="en-US" sz="1200" dirty="0">
@@ -4771,7 +4590,7 @@
                 <a:ea typeface="Menlo" pitchFamily="34" charset="-122"/>
                 <a:cs typeface="Menlo" pitchFamily="34" charset="-120"/>
               </a:rPr>
-              <a:t>2.</a:t>
+              <a:t>2. **개인 블로그** </a:t>
             </a:r>
             <a:r>
               <a:rPr lang="en-US" sz="1200" b="1" dirty="0">
@@ -4782,7 +4601,7 @@
                 <a:ea typeface="Menlo" pitchFamily="34" charset="-122"/>
                 <a:cs typeface="Menlo" pitchFamily="34" charset="-120"/>
               </a:rPr>
-              <a:t>**개인 블로그**</a:t>
+              <a:t/>
             </a:r>
             <a:r>
               <a:rPr lang="en-US" sz="1200" dirty="0">
@@ -4952,7 +4771,7 @@
                 </a:solidFill>
                 <a:latin typeface="Pretendard"/>
               </a:rPr>
-              <a:t>© 2026 이애본(드림아이티비즈) · useful-ai.dreamitbiz.com · 교육 목적 비영리 이용 · 출처 표기</a:t>
+              <a:t>© 2026 이애본 · 홍문원(洪文院) 발행 · CC BY-NC-ND 4.0 · useful-ai.dreamitbiz.com</a:t>
             </a:r>
           </a:p>
         </p:txBody>
@@ -4966,1536 +4785,6 @@
 </file>
 
 <file path=ppt/slides/slide11.xml><?xml version="1.0" encoding="utf-8"?>
-<p:sld xmlns:a="http://schemas.openxmlformats.org/drawingml/2006/main" xmlns:r="http://schemas.openxmlformats.org/officeDocument/2006/relationships" xmlns:p="http://schemas.openxmlformats.org/presentationml/2006/main">
-  <p:cSld>
-    <p:spTree>
-      <p:nvGrpSpPr>
-        <p:cNvPr id="1" name="">
-          <a:extLst>
-            <a:ext uri="{FF2B5EF4-FFF2-40B4-BE49-F238E27FC236}">
-              <a16:creationId xmlns:a16="http://schemas.microsoft.com/office/drawing/2014/main" id="{A187AA98-499F-8E84-AEFC-565AA5822C92}"/>
-            </a:ext>
-          </a:extLst>
-        </p:cNvPr>
-        <p:cNvGrpSpPr/>
-        <p:nvPr/>
-      </p:nvGrpSpPr>
-      <p:grpSpPr>
-        <a:xfrm>
-          <a:off x="0" y="0"/>
-          <a:ext cx="0" cy="0"/>
-          <a:chOff x="0" y="0"/>
-          <a:chExt cx="0" cy="0"/>
-        </a:xfrm>
-      </p:grpSpPr>
-      <p:sp>
-        <p:nvSpPr>
-          <p:cNvPr id="2" name="Shape 0">
-            <a:extLst>
-              <a:ext uri="{FF2B5EF4-FFF2-40B4-BE49-F238E27FC236}">
-                <a16:creationId xmlns:a16="http://schemas.microsoft.com/office/drawing/2014/main" id="{5AFFBC10-043C-83C8-ACB1-E3E3D8593046}"/>
-              </a:ext>
-            </a:extLst>
-          </p:cNvPr>
-          <p:cNvSpPr/>
-          <p:nvPr/>
-        </p:nvSpPr>
-        <p:spPr>
-          <a:xfrm>
-            <a:off x="0" y="0"/>
-            <a:ext cx="12191695" cy="6858000"/>
-          </a:xfrm>
-          <a:prstGeom prst="rect">
-            <a:avLst/>
-          </a:prstGeom>
-          <a:solidFill>
-            <a:srgbClr val="0F172A"/>
-          </a:solidFill>
-          <a:ln w="12700">
-            <a:solidFill>
-              <a:srgbClr val="FFFFFF">
-                <a:alpha val="0"/>
-              </a:srgbClr>
-            </a:solidFill>
-            <a:prstDash val="solid"/>
-          </a:ln>
-        </p:spPr>
-        <p:txBody>
-          <a:bodyPr/>
-          <a:lstStyle/>
-          <a:p>
-            <a:endParaRPr lang="ko-KR" altLang="en-US"/>
-          </a:p>
-        </p:txBody>
-      </p:sp>
-      <p:sp>
-        <p:nvSpPr>
-          <p:cNvPr id="3" name="Shape 1">
-            <a:extLst>
-              <a:ext uri="{FF2B5EF4-FFF2-40B4-BE49-F238E27FC236}">
-                <a16:creationId xmlns:a16="http://schemas.microsoft.com/office/drawing/2014/main" id="{85E1B9BD-E535-ECAF-3D7F-D5F7DE82F8E7}"/>
-              </a:ext>
-            </a:extLst>
-          </p:cNvPr>
-          <p:cNvSpPr/>
-          <p:nvPr/>
-        </p:nvSpPr>
-        <p:spPr>
-          <a:xfrm>
-            <a:off x="0" y="0"/>
-            <a:ext cx="12191695" cy="6858000"/>
-          </a:xfrm>
-          <a:prstGeom prst="rect">
-            <a:avLst/>
-          </a:prstGeom>
-          <a:solidFill>
-            <a:srgbClr val="0F172A"/>
-          </a:solidFill>
-          <a:ln w="12700">
-            <a:solidFill>
-              <a:srgbClr val="FFFFFF">
-                <a:alpha val="0"/>
-              </a:srgbClr>
-            </a:solidFill>
-            <a:prstDash val="solid"/>
-          </a:ln>
-        </p:spPr>
-        <p:txBody>
-          <a:bodyPr/>
-          <a:lstStyle/>
-          <a:p>
-            <a:endParaRPr lang="ko-KR" altLang="en-US"/>
-          </a:p>
-        </p:txBody>
-      </p:sp>
-      <p:sp>
-        <p:nvSpPr>
-          <p:cNvPr id="4" name="Shape 2">
-            <a:extLst>
-              <a:ext uri="{FF2B5EF4-FFF2-40B4-BE49-F238E27FC236}">
-                <a16:creationId xmlns:a16="http://schemas.microsoft.com/office/drawing/2014/main" id="{C8B8678D-8445-D386-DD8D-58D778D6B877}"/>
-              </a:ext>
-            </a:extLst>
-          </p:cNvPr>
-          <p:cNvSpPr/>
-          <p:nvPr/>
-        </p:nvSpPr>
-        <p:spPr>
-          <a:xfrm>
-            <a:off x="0" y="0"/>
-            <a:ext cx="12191695" cy="6858000"/>
-          </a:xfrm>
-          <a:prstGeom prst="rect">
-            <a:avLst/>
-          </a:prstGeom>
-          <a:solidFill>
-            <a:srgbClr val="1E293B">
-              <a:alpha val="40000"/>
-            </a:srgbClr>
-          </a:solidFill>
-          <a:ln w="12700">
-            <a:solidFill>
-              <a:srgbClr val="FFFFFF">
-                <a:alpha val="0"/>
-              </a:srgbClr>
-            </a:solidFill>
-            <a:prstDash val="solid"/>
-          </a:ln>
-        </p:spPr>
-        <p:txBody>
-          <a:bodyPr/>
-          <a:lstStyle/>
-          <a:p>
-            <a:endParaRPr lang="ko-KR" altLang="en-US"/>
-          </a:p>
-        </p:txBody>
-      </p:sp>
-      <p:sp>
-        <p:nvSpPr>
-          <p:cNvPr id="5" name="Shape 3">
-            <a:extLst>
-              <a:ext uri="{FF2B5EF4-FFF2-40B4-BE49-F238E27FC236}">
-                <a16:creationId xmlns:a16="http://schemas.microsoft.com/office/drawing/2014/main" id="{D489E566-0980-690F-9E4F-EEF0AF18F1EB}"/>
-              </a:ext>
-            </a:extLst>
-          </p:cNvPr>
-          <p:cNvSpPr/>
-          <p:nvPr/>
-        </p:nvSpPr>
-        <p:spPr>
-          <a:xfrm>
-            <a:off x="0" y="6819595"/>
-            <a:ext cx="12191695" cy="38405"/>
-          </a:xfrm>
-          <a:prstGeom prst="rect">
-            <a:avLst/>
-          </a:prstGeom>
-          <a:solidFill>
-            <a:srgbClr val="2563EB">
-              <a:alpha val="50000"/>
-            </a:srgbClr>
-          </a:solidFill>
-          <a:ln w="12700">
-            <a:solidFill>
-              <a:srgbClr val="FFFFFF">
-                <a:alpha val="0"/>
-              </a:srgbClr>
-            </a:solidFill>
-            <a:prstDash val="solid"/>
-          </a:ln>
-        </p:spPr>
-        <p:txBody>
-          <a:bodyPr/>
-          <a:lstStyle/>
-          <a:p>
-            <a:endParaRPr lang="ko-KR" altLang="en-US"/>
-          </a:p>
-        </p:txBody>
-      </p:sp>
-      <p:sp>
-        <p:nvSpPr>
-          <p:cNvPr id="6" name="Shape 4">
-            <a:extLst>
-              <a:ext uri="{FF2B5EF4-FFF2-40B4-BE49-F238E27FC236}">
-                <a16:creationId xmlns:a16="http://schemas.microsoft.com/office/drawing/2014/main" id="{DEB6BD79-8717-FAB0-4747-327F54513E8C}"/>
-              </a:ext>
-            </a:extLst>
-          </p:cNvPr>
-          <p:cNvSpPr/>
-          <p:nvPr/>
-        </p:nvSpPr>
-        <p:spPr>
-          <a:xfrm>
-            <a:off x="-952805" y="-952805"/>
-            <a:ext cx="4762195" cy="4762195"/>
-          </a:xfrm>
-          <a:prstGeom prst="ellipse">
-            <a:avLst/>
-          </a:prstGeom>
-          <a:solidFill>
-            <a:srgbClr val="3B82F6">
-              <a:alpha val="40000"/>
-            </a:srgbClr>
-          </a:solidFill>
-          <a:ln w="12700">
-            <a:solidFill>
-              <a:srgbClr val="FFFFFF">
-                <a:alpha val="0"/>
-              </a:srgbClr>
-            </a:solidFill>
-            <a:prstDash val="solid"/>
-          </a:ln>
-        </p:spPr>
-        <p:txBody>
-          <a:bodyPr/>
-          <a:lstStyle/>
-          <a:p>
-            <a:endParaRPr lang="ko-KR" altLang="en-US"/>
-          </a:p>
-        </p:txBody>
-      </p:sp>
-      <p:sp>
-        <p:nvSpPr>
-          <p:cNvPr id="7" name="Shape 5">
-            <a:extLst>
-              <a:ext uri="{FF2B5EF4-FFF2-40B4-BE49-F238E27FC236}">
-                <a16:creationId xmlns:a16="http://schemas.microsoft.com/office/drawing/2014/main" id="{16CEB2EE-F625-E67F-5538-C799C13472FB}"/>
-              </a:ext>
-            </a:extLst>
-          </p:cNvPr>
-          <p:cNvSpPr/>
-          <p:nvPr/>
-        </p:nvSpPr>
-        <p:spPr>
-          <a:xfrm>
-            <a:off x="8858707" y="3524098"/>
-            <a:ext cx="3810305" cy="3810305"/>
-          </a:xfrm>
-          <a:prstGeom prst="ellipse">
-            <a:avLst/>
-          </a:prstGeom>
-          <a:solidFill>
-            <a:srgbClr val="4F46E5">
-              <a:alpha val="40000"/>
-            </a:srgbClr>
-          </a:solidFill>
-          <a:ln w="12700">
-            <a:solidFill>
-              <a:srgbClr val="FFFFFF">
-                <a:alpha val="0"/>
-              </a:srgbClr>
-            </a:solidFill>
-            <a:prstDash val="solid"/>
-          </a:ln>
-        </p:spPr>
-        <p:txBody>
-          <a:bodyPr/>
-          <a:lstStyle/>
-          <a:p>
-            <a:endParaRPr lang="ko-KR" altLang="en-US"/>
-          </a:p>
-        </p:txBody>
-      </p:sp>
-      <p:sp>
-        <p:nvSpPr>
-          <p:cNvPr id="8" name="Shape 6">
-            <a:extLst>
-              <a:ext uri="{FF2B5EF4-FFF2-40B4-BE49-F238E27FC236}">
-                <a16:creationId xmlns:a16="http://schemas.microsoft.com/office/drawing/2014/main" id="{F1C95158-8340-5F9A-4235-D38BECDD4B4C}"/>
-              </a:ext>
-            </a:extLst>
-          </p:cNvPr>
-          <p:cNvSpPr/>
-          <p:nvPr/>
-        </p:nvSpPr>
-        <p:spPr>
-          <a:xfrm>
-            <a:off x="3238805" y="571500"/>
-            <a:ext cx="5715000" cy="5715000"/>
-          </a:xfrm>
-          <a:prstGeom prst="ellipse">
-            <a:avLst/>
-          </a:prstGeom>
-          <a:solidFill>
-            <a:srgbClr val="1E40AF">
-              <a:alpha val="20000"/>
-            </a:srgbClr>
-          </a:solidFill>
-          <a:ln w="12700">
-            <a:solidFill>
-              <a:srgbClr val="FFFFFF">
-                <a:alpha val="0"/>
-              </a:srgbClr>
-            </a:solidFill>
-            <a:prstDash val="solid"/>
-          </a:ln>
-        </p:spPr>
-        <p:txBody>
-          <a:bodyPr/>
-          <a:lstStyle/>
-          <a:p>
-            <a:endParaRPr lang="ko-KR" altLang="en-US"/>
-          </a:p>
-        </p:txBody>
-      </p:sp>
-      <p:sp>
-        <p:nvSpPr>
-          <p:cNvPr id="9" name="Shape 7">
-            <a:extLst>
-              <a:ext uri="{FF2B5EF4-FFF2-40B4-BE49-F238E27FC236}">
-                <a16:creationId xmlns:a16="http://schemas.microsoft.com/office/drawing/2014/main" id="{E337B77B-0944-6C49-2585-E9EE4D8639F4}"/>
-              </a:ext>
-            </a:extLst>
-          </p:cNvPr>
-          <p:cNvSpPr/>
-          <p:nvPr/>
-        </p:nvSpPr>
-        <p:spPr>
-          <a:xfrm>
-            <a:off x="3238805" y="571500"/>
-            <a:ext cx="5715000" cy="5715000"/>
-          </a:xfrm>
-          <a:prstGeom prst="ellipse">
-            <a:avLst/>
-          </a:prstGeom>
-          <a:noFill/>
-          <a:ln w="12700">
-            <a:solidFill>
-              <a:srgbClr val="3B82F6">
-                <a:alpha val="20000"/>
-              </a:srgbClr>
-            </a:solidFill>
-            <a:prstDash val="solid"/>
-          </a:ln>
-        </p:spPr>
-        <p:txBody>
-          <a:bodyPr/>
-          <a:lstStyle/>
-          <a:p>
-            <a:endParaRPr lang="ko-KR" altLang="en-US"/>
-          </a:p>
-        </p:txBody>
-      </p:sp>
-      <p:sp>
-        <p:nvSpPr>
-          <p:cNvPr id="10" name="Shape 8">
-            <a:extLst>
-              <a:ext uri="{FF2B5EF4-FFF2-40B4-BE49-F238E27FC236}">
-                <a16:creationId xmlns:a16="http://schemas.microsoft.com/office/drawing/2014/main" id="{BD82B83F-30F7-65C2-83F4-67DBB9BDBFCF}"/>
-              </a:ext>
-            </a:extLst>
-          </p:cNvPr>
-          <p:cNvSpPr/>
-          <p:nvPr/>
-        </p:nvSpPr>
-        <p:spPr>
-          <a:xfrm>
-            <a:off x="2286000" y="-381305"/>
-            <a:ext cx="7619695" cy="7619695"/>
-          </a:xfrm>
-          <a:prstGeom prst="ellipse">
-            <a:avLst/>
-          </a:prstGeom>
-          <a:noFill/>
-          <a:ln w="12700">
-            <a:solidFill>
-              <a:srgbClr val="3B82F6">
-                <a:alpha val="10000"/>
-              </a:srgbClr>
-            </a:solidFill>
-            <a:prstDash val="solid"/>
-          </a:ln>
-        </p:spPr>
-        <p:txBody>
-          <a:bodyPr/>
-          <a:lstStyle/>
-          <a:p>
-            <a:endParaRPr lang="ko-KR" altLang="en-US"/>
-          </a:p>
-        </p:txBody>
-      </p:sp>
-      <p:sp>
-        <p:nvSpPr>
-          <p:cNvPr id="11" name="Shape 9">
-            <a:extLst>
-              <a:ext uri="{FF2B5EF4-FFF2-40B4-BE49-F238E27FC236}">
-                <a16:creationId xmlns:a16="http://schemas.microsoft.com/office/drawing/2014/main" id="{2F66916F-4643-F4BD-171D-CD78742B16A0}"/>
-              </a:ext>
-            </a:extLst>
-          </p:cNvPr>
-          <p:cNvSpPr/>
-          <p:nvPr/>
-        </p:nvSpPr>
-        <p:spPr>
-          <a:xfrm>
-            <a:off x="1333195" y="-1333195"/>
-            <a:ext cx="9525305" cy="9525305"/>
-          </a:xfrm>
-          <a:prstGeom prst="ellipse">
-            <a:avLst/>
-          </a:prstGeom>
-          <a:noFill/>
-          <a:ln w="12700">
-            <a:solidFill>
-              <a:srgbClr val="3B82F6">
-                <a:alpha val="5000"/>
-              </a:srgbClr>
-            </a:solidFill>
-            <a:prstDash val="solid"/>
-          </a:ln>
-        </p:spPr>
-        <p:txBody>
-          <a:bodyPr/>
-          <a:lstStyle/>
-          <a:p>
-            <a:endParaRPr lang="ko-KR" altLang="en-US"/>
-          </a:p>
-        </p:txBody>
-      </p:sp>
-      <p:sp>
-        <p:nvSpPr>
-          <p:cNvPr id="12" name="Text 10">
-            <a:extLst>
-              <a:ext uri="{FF2B5EF4-FFF2-40B4-BE49-F238E27FC236}">
-                <a16:creationId xmlns:a16="http://schemas.microsoft.com/office/drawing/2014/main" id="{4AD5B87D-76E8-DC44-E4FC-8AAE13C8AFB2}"/>
-              </a:ext>
-            </a:extLst>
-          </p:cNvPr>
-          <p:cNvSpPr txBox="1"/>
-          <p:nvPr/>
-        </p:nvSpPr>
-        <p:spPr>
-          <a:xfrm>
-            <a:off x="1138428" y="1289405"/>
-            <a:ext cx="886054" cy="152705"/>
-          </a:xfrm>
-          <a:prstGeom prst="rect">
-            <a:avLst/>
-          </a:prstGeom>
-          <a:noFill/>
-          <a:ln/>
-        </p:spPr>
-        <p:txBody>
-          <a:bodyPr wrap="square" lIns="0" tIns="0" rIns="0" bIns="0" rtlCol="0" anchor="ctr"/>
-          <a:lstStyle/>
-          <a:p>
-            <a:pPr marL="0" indent="0" algn="l">
-              <a:buNone/>
-            </a:pPr>
-            <a:r>
-              <a:rPr lang="en-US" sz="1000" dirty="0">
-                <a:solidFill>
-                  <a:srgbClr val="94A3B8">
-                    <a:alpha val="30000"/>
-                  </a:srgbClr>
-                </a:solidFill>
-                <a:latin typeface="Consolas" pitchFamily="34" charset="0"/>
-                <a:ea typeface="Consolas" pitchFamily="34" charset="-122"/>
-                <a:cs typeface="Consolas" pitchFamily="34" charset="-120"/>
-              </a:rPr>
-              <a:t># Markdown</a:t>
-            </a:r>
-            <a:endParaRPr lang="en-US" sz="1000" dirty="0"/>
-          </a:p>
-        </p:txBody>
-      </p:sp>
-      <p:sp>
-        <p:nvSpPr>
-          <p:cNvPr id="13" name="Text 11">
-            <a:extLst>
-              <a:ext uri="{FF2B5EF4-FFF2-40B4-BE49-F238E27FC236}">
-                <a16:creationId xmlns:a16="http://schemas.microsoft.com/office/drawing/2014/main" id="{8CDEAFF3-08CE-F630-0A0A-77AE16542611}"/>
-              </a:ext>
-            </a:extLst>
-          </p:cNvPr>
-          <p:cNvSpPr txBox="1"/>
-          <p:nvPr/>
-        </p:nvSpPr>
-        <p:spPr>
-          <a:xfrm>
-            <a:off x="9720986" y="1733702"/>
-            <a:ext cx="724205" cy="152705"/>
-          </a:xfrm>
-          <a:prstGeom prst="rect">
-            <a:avLst/>
-          </a:prstGeom>
-          <a:noFill/>
-          <a:ln/>
-        </p:spPr>
-        <p:txBody>
-          <a:bodyPr wrap="square" lIns="0" tIns="0" rIns="0" bIns="0" rtlCol="0" anchor="ctr"/>
-          <a:lstStyle/>
-          <a:p>
-            <a:pPr marL="0" indent="0" algn="l">
-              <a:buNone/>
-            </a:pPr>
-            <a:r>
-              <a:rPr lang="en-US" sz="1000" dirty="0">
-                <a:solidFill>
-                  <a:srgbClr val="94A3B8">
-                    <a:alpha val="30000"/>
-                  </a:srgbClr>
-                </a:solidFill>
-                <a:latin typeface="Consolas" pitchFamily="34" charset="0"/>
-                <a:ea typeface="Consolas" pitchFamily="34" charset="-122"/>
-                <a:cs typeface="Consolas" pitchFamily="34" charset="-120"/>
-              </a:rPr>
-              <a:t>**Bold**</a:t>
-            </a:r>
-            <a:endParaRPr lang="en-US" sz="1000" dirty="0"/>
-          </a:p>
-        </p:txBody>
-      </p:sp>
-      <p:sp>
-        <p:nvSpPr>
-          <p:cNvPr id="14" name="Text 12">
-            <a:extLst>
-              <a:ext uri="{FF2B5EF4-FFF2-40B4-BE49-F238E27FC236}">
-                <a16:creationId xmlns:a16="http://schemas.microsoft.com/office/drawing/2014/main" id="{8CB18632-4B51-D5A2-3573-73B60575F207}"/>
-              </a:ext>
-            </a:extLst>
-          </p:cNvPr>
-          <p:cNvSpPr txBox="1"/>
-          <p:nvPr/>
-        </p:nvSpPr>
-        <p:spPr>
-          <a:xfrm>
-            <a:off x="1828800" y="5305349"/>
-            <a:ext cx="962863" cy="152705"/>
-          </a:xfrm>
-          <a:prstGeom prst="rect">
-            <a:avLst/>
-          </a:prstGeom>
-          <a:noFill/>
-          <a:ln/>
-        </p:spPr>
-        <p:txBody>
-          <a:bodyPr wrap="square" lIns="0" tIns="0" rIns="0" bIns="0" rtlCol="0" anchor="ctr"/>
-          <a:lstStyle/>
-          <a:p>
-            <a:pPr marL="0" indent="0" algn="l">
-              <a:buNone/>
-            </a:pPr>
-            <a:r>
-              <a:rPr lang="en-US" sz="1000" dirty="0">
-                <a:solidFill>
-                  <a:srgbClr val="94A3B8">
-                    <a:alpha val="30000"/>
-                  </a:srgbClr>
-                </a:solidFill>
-                <a:latin typeface="Consolas" pitchFamily="34" charset="0"/>
-                <a:ea typeface="Consolas" pitchFamily="34" charset="-122"/>
-                <a:cs typeface="Consolas" pitchFamily="34" charset="-120"/>
-              </a:rPr>
-              <a:t>[Link](url)</a:t>
-            </a:r>
-            <a:endParaRPr lang="en-US" sz="1000" dirty="0"/>
-          </a:p>
-        </p:txBody>
-      </p:sp>
-      <p:sp>
-        <p:nvSpPr>
-          <p:cNvPr id="15" name="Text 13">
-            <a:extLst>
-              <a:ext uri="{FF2B5EF4-FFF2-40B4-BE49-F238E27FC236}">
-                <a16:creationId xmlns:a16="http://schemas.microsoft.com/office/drawing/2014/main" id="{3EA8A559-29D1-B2E9-3D4D-686DEB7464BF}"/>
-              </a:ext>
-            </a:extLst>
-          </p:cNvPr>
-          <p:cNvSpPr txBox="1"/>
-          <p:nvPr/>
-        </p:nvSpPr>
-        <p:spPr>
-          <a:xfrm>
-            <a:off x="10490911" y="5648249"/>
-            <a:ext cx="562356" cy="152705"/>
-          </a:xfrm>
-          <a:prstGeom prst="rect">
-            <a:avLst/>
-          </a:prstGeom>
-          <a:noFill/>
-          <a:ln/>
-        </p:spPr>
-        <p:txBody>
-          <a:bodyPr wrap="square" lIns="0" tIns="0" rIns="0" bIns="0" rtlCol="0" anchor="ctr"/>
-          <a:lstStyle/>
-          <a:p>
-            <a:pPr marL="0" indent="0" algn="l">
-              <a:buNone/>
-            </a:pPr>
-            <a:r>
-              <a:rPr lang="en-US" sz="1000" dirty="0">
-                <a:solidFill>
-                  <a:srgbClr val="94A3B8">
-                    <a:alpha val="30000"/>
-                  </a:srgbClr>
-                </a:solidFill>
-                <a:latin typeface="Consolas" pitchFamily="34" charset="0"/>
-                <a:ea typeface="Consolas" pitchFamily="34" charset="-122"/>
-                <a:cs typeface="Consolas" pitchFamily="34" charset="-120"/>
-              </a:rPr>
-              <a:t>`code`</a:t>
-            </a:r>
-            <a:endParaRPr lang="en-US" sz="1000" dirty="0"/>
-          </a:p>
-        </p:txBody>
-      </p:sp>
-      <p:sp>
-        <p:nvSpPr>
-          <p:cNvPr id="16" name="Text 14">
-            <a:extLst>
-              <a:ext uri="{FF2B5EF4-FFF2-40B4-BE49-F238E27FC236}">
-                <a16:creationId xmlns:a16="http://schemas.microsoft.com/office/drawing/2014/main" id="{E0002449-4F5F-651E-92E7-E307397EE058}"/>
-              </a:ext>
-            </a:extLst>
-          </p:cNvPr>
-          <p:cNvSpPr txBox="1"/>
-          <p:nvPr/>
-        </p:nvSpPr>
-        <p:spPr>
-          <a:xfrm>
-            <a:off x="6882689" y="724205"/>
-            <a:ext cx="1733702" cy="267005"/>
-          </a:xfrm>
-          <a:prstGeom prst="rect">
-            <a:avLst/>
-          </a:prstGeom>
-          <a:noFill/>
-          <a:ln/>
-        </p:spPr>
-        <p:txBody>
-          <a:bodyPr wrap="square" lIns="0" tIns="0" rIns="0" bIns="0" rtlCol="0" anchor="ctr"/>
-          <a:lstStyle/>
-          <a:p>
-            <a:pPr marL="0" indent="0" algn="l">
-              <a:buNone/>
-            </a:pPr>
-            <a:r>
-              <a:rPr lang="en-US" sz="1800" dirty="0">
-                <a:solidFill>
-                  <a:srgbClr val="94A3B8">
-                    <a:alpha val="10000"/>
-                  </a:srgbClr>
-                </a:solidFill>
-                <a:latin typeface="Consolas" pitchFamily="34" charset="0"/>
-                <a:ea typeface="Consolas" pitchFamily="34" charset="-122"/>
-                <a:cs typeface="Consolas" pitchFamily="34" charset="-120"/>
-              </a:rPr>
-              <a:t>&gt; Blockquote</a:t>
-            </a:r>
-            <a:endParaRPr lang="en-US" sz="1800" dirty="0"/>
-          </a:p>
-        </p:txBody>
-      </p:sp>
-      <p:sp>
-        <p:nvSpPr>
-          <p:cNvPr id="17" name="Shape 15">
-            <a:extLst>
-              <a:ext uri="{FF2B5EF4-FFF2-40B4-BE49-F238E27FC236}">
-                <a16:creationId xmlns:a16="http://schemas.microsoft.com/office/drawing/2014/main" id="{43F3879B-AFB3-B8FE-67EB-64F6EFCF3541}"/>
-              </a:ext>
-            </a:extLst>
-          </p:cNvPr>
-          <p:cNvSpPr/>
-          <p:nvPr/>
-        </p:nvSpPr>
-        <p:spPr>
-          <a:xfrm>
-            <a:off x="665683" y="665683"/>
-            <a:ext cx="1733702" cy="323698"/>
-          </a:xfrm>
-          <a:prstGeom prst="roundRect">
-            <a:avLst>
-              <a:gd name="adj" fmla="val 282486"/>
-            </a:avLst>
-          </a:prstGeom>
-          <a:noFill/>
-          <a:ln w="12700">
-            <a:solidFill>
-              <a:srgbClr val="E5E7EB"/>
-            </a:solidFill>
-            <a:prstDash val="solid"/>
-          </a:ln>
-        </p:spPr>
-        <p:txBody>
-          <a:bodyPr/>
-          <a:lstStyle/>
-          <a:p>
-            <a:endParaRPr lang="ko-KR" altLang="en-US"/>
-          </a:p>
-        </p:txBody>
-      </p:sp>
-      <p:sp>
-        <p:nvSpPr>
-          <p:cNvPr id="18" name="Text 16">
-            <a:extLst>
-              <a:ext uri="{FF2B5EF4-FFF2-40B4-BE49-F238E27FC236}">
-                <a16:creationId xmlns:a16="http://schemas.microsoft.com/office/drawing/2014/main" id="{F920404E-E6DC-DA76-E83C-380786023A81}"/>
-              </a:ext>
-            </a:extLst>
-          </p:cNvPr>
-          <p:cNvSpPr txBox="1"/>
-          <p:nvPr/>
-        </p:nvSpPr>
-        <p:spPr>
-          <a:xfrm>
-            <a:off x="802843" y="732434"/>
-            <a:ext cx="1459382" cy="191110"/>
-          </a:xfrm>
-          <a:prstGeom prst="rect">
-            <a:avLst/>
-          </a:prstGeom>
-          <a:noFill/>
-          <a:ln/>
-        </p:spPr>
-        <p:txBody>
-          <a:bodyPr wrap="square" lIns="0" tIns="0" rIns="0" bIns="0" rtlCol="0" anchor="ctr"/>
-          <a:lstStyle/>
-          <a:p>
-            <a:pPr marL="0" indent="0" algn="ctr">
-              <a:buNone/>
-            </a:pPr>
-            <a:r>
-              <a:rPr lang="en-US" sz="1000" b="1" dirty="0">
-                <a:solidFill>
-                  <a:srgbClr val="93C5FD"/>
-                </a:solidFill>
-                <a:latin typeface="Noto Sans KR" pitchFamily="34" charset="0"/>
-                <a:ea typeface="Noto Sans KR" pitchFamily="34" charset="-122"/>
-                <a:cs typeface="Noto Sans KR" pitchFamily="34" charset="-120"/>
-              </a:rPr>
-              <a:t>Video Course 2026</a:t>
-            </a:r>
-            <a:endParaRPr lang="en-US" sz="1000" dirty="0"/>
-          </a:p>
-        </p:txBody>
-      </p:sp>
-      <p:sp>
-        <p:nvSpPr>
-          <p:cNvPr id="19" name="Text 17">
-            <a:extLst>
-              <a:ext uri="{FF2B5EF4-FFF2-40B4-BE49-F238E27FC236}">
-                <a16:creationId xmlns:a16="http://schemas.microsoft.com/office/drawing/2014/main" id="{8188DCDC-E333-CE1F-56C9-B3D43B849142}"/>
-              </a:ext>
-            </a:extLst>
-          </p:cNvPr>
-          <p:cNvSpPr txBox="1"/>
-          <p:nvPr/>
-        </p:nvSpPr>
-        <p:spPr>
-          <a:xfrm>
-            <a:off x="1295705" y="1713586"/>
-            <a:ext cx="5572354" cy="1143000"/>
-          </a:xfrm>
-          <a:prstGeom prst="rect">
-            <a:avLst/>
-          </a:prstGeom>
-          <a:noFill/>
-          <a:ln/>
-        </p:spPr>
-        <p:txBody>
-          <a:bodyPr wrap="square" lIns="0" tIns="0" rIns="0" bIns="0" rtlCol="0" anchor="ctr"/>
-          <a:lstStyle/>
-          <a:p>
-            <a:pPr marL="0" indent="0" algn="l">
-              <a:buNone/>
-            </a:pPr>
-            <a:r>
-              <a:rPr lang="en-US" sz="7200" b="1" kern="0" spc="-180" dirty="0">
-                <a:solidFill>
-                  <a:srgbClr val="FFFFFF"/>
-                </a:solidFill>
-                <a:latin typeface="Noto Sans KR" pitchFamily="34" charset="0"/>
-                <a:ea typeface="Noto Sans KR" pitchFamily="34" charset="-122"/>
-                <a:cs typeface="Noto Sans KR" pitchFamily="34" charset="-120"/>
-              </a:rPr>
-              <a:t>마크다운</a:t>
-            </a:r>
-            <a:endParaRPr lang="en-US" sz="7200" dirty="0"/>
-          </a:p>
-        </p:txBody>
-      </p:sp>
-      <p:sp>
-        <p:nvSpPr>
-          <p:cNvPr id="20" name="Text 18">
-            <a:extLst>
-              <a:ext uri="{FF2B5EF4-FFF2-40B4-BE49-F238E27FC236}">
-                <a16:creationId xmlns:a16="http://schemas.microsoft.com/office/drawing/2014/main" id="{8580BAA0-594C-84F8-CD12-CC45D2BD24B8}"/>
-              </a:ext>
-            </a:extLst>
-          </p:cNvPr>
-          <p:cNvSpPr txBox="1"/>
-          <p:nvPr/>
-        </p:nvSpPr>
-        <p:spPr>
-          <a:xfrm>
-            <a:off x="223114" y="2906878"/>
-            <a:ext cx="7464247" cy="857707"/>
-          </a:xfrm>
-          <a:prstGeom prst="rect">
-            <a:avLst/>
-          </a:prstGeom>
-          <a:noFill/>
-          <a:ln/>
-        </p:spPr>
-        <p:txBody>
-          <a:bodyPr wrap="square" lIns="0" tIns="0" rIns="0" bIns="0" rtlCol="0" anchor="ctr"/>
-          <a:lstStyle/>
-          <a:p>
-            <a:pPr marL="0" indent="0" algn="ctr">
-              <a:buNone/>
-            </a:pPr>
-            <a:r>
-              <a:rPr lang="en-US" sz="5400" b="1" kern="0" spc="-135" dirty="0">
-                <a:solidFill>
-                  <a:srgbClr val="60A5FA"/>
-                </a:solidFill>
-                <a:latin typeface="Noto Sans KR" pitchFamily="34" charset="0"/>
-                <a:ea typeface="Noto Sans KR" pitchFamily="34" charset="-122"/>
-                <a:cs typeface="Noto Sans KR" pitchFamily="34" charset="-120"/>
-              </a:rPr>
-              <a:t>실전 마스터 클래스</a:t>
-            </a:r>
-            <a:endParaRPr lang="en-US" sz="5400" dirty="0"/>
-          </a:p>
-        </p:txBody>
-      </p:sp>
-      <p:sp>
-        <p:nvSpPr>
-          <p:cNvPr id="21" name="Text 19">
-            <a:extLst>
-              <a:ext uri="{FF2B5EF4-FFF2-40B4-BE49-F238E27FC236}">
-                <a16:creationId xmlns:a16="http://schemas.microsoft.com/office/drawing/2014/main" id="{429F0981-9AA3-B540-B327-11E891D9DF54}"/>
-              </a:ext>
-            </a:extLst>
-          </p:cNvPr>
-          <p:cNvSpPr txBox="1"/>
-          <p:nvPr/>
-        </p:nvSpPr>
-        <p:spPr>
-          <a:xfrm>
-            <a:off x="1356970" y="4198010"/>
-            <a:ext cx="4715561" cy="372161"/>
-          </a:xfrm>
-          <a:prstGeom prst="rect">
-            <a:avLst/>
-          </a:prstGeom>
-          <a:noFill/>
-          <a:ln/>
-        </p:spPr>
-        <p:txBody>
-          <a:bodyPr wrap="square" lIns="0" tIns="0" rIns="0" bIns="0" rtlCol="0" anchor="ctr"/>
-          <a:lstStyle/>
-          <a:p>
-            <a:pPr marL="0" indent="0" algn="l">
-              <a:buNone/>
-            </a:pPr>
-            <a:r>
-              <a:rPr lang="en-US" sz="1800" dirty="0">
-                <a:solidFill>
-                  <a:srgbClr val="FFFFFF"/>
-                </a:solidFill>
-                <a:latin typeface="Noto Sans KR" pitchFamily="34" charset="0"/>
-                <a:ea typeface="Noto Sans KR" pitchFamily="34" charset="-122"/>
-                <a:cs typeface="Noto Sans KR" pitchFamily="34" charset="-120"/>
-              </a:rPr>
-              <a:t>대학생을 위한 문서 작성의 기술.</a:t>
-            </a:r>
-            <a:endParaRPr lang="en-US" sz="1800" dirty="0"/>
-          </a:p>
-        </p:txBody>
-      </p:sp>
-      <p:sp>
-        <p:nvSpPr>
-          <p:cNvPr id="22" name="Text 20">
-            <a:extLst>
-              <a:ext uri="{FF2B5EF4-FFF2-40B4-BE49-F238E27FC236}">
-                <a16:creationId xmlns:a16="http://schemas.microsoft.com/office/drawing/2014/main" id="{31B6980D-E7DC-A7D0-32D8-6DC9A812B57F}"/>
-              </a:ext>
-            </a:extLst>
-          </p:cNvPr>
-          <p:cNvSpPr txBox="1"/>
-          <p:nvPr/>
-        </p:nvSpPr>
-        <p:spPr>
-          <a:xfrm>
-            <a:off x="1323137" y="4637837"/>
-            <a:ext cx="5759806" cy="372161"/>
-          </a:xfrm>
-          <a:prstGeom prst="rect">
-            <a:avLst/>
-          </a:prstGeom>
-          <a:noFill/>
-          <a:ln/>
-        </p:spPr>
-        <p:txBody>
-          <a:bodyPr wrap="square" lIns="0" tIns="0" rIns="0" bIns="0" rtlCol="0" anchor="ctr"/>
-          <a:lstStyle/>
-          <a:p>
-            <a:pPr marL="0" indent="0" algn="l">
-              <a:buNone/>
-            </a:pPr>
-            <a:r>
-              <a:rPr lang="en-US" sz="1800" dirty="0" err="1">
-                <a:solidFill>
-                  <a:srgbClr val="FFFFFF"/>
-                </a:solidFill>
-                <a:latin typeface="Noto Sans KR" pitchFamily="34" charset="0"/>
-                <a:ea typeface="Noto Sans KR" pitchFamily="34" charset="-122"/>
-                <a:cs typeface="Noto Sans KR" pitchFamily="34" charset="-120"/>
-              </a:rPr>
-              <a:t>기본</a:t>
-            </a:r>
-            <a:r>
-              <a:rPr lang="en-US" sz="1800" dirty="0">
-                <a:solidFill>
-                  <a:srgbClr val="FFFFFF"/>
-                </a:solidFill>
-                <a:latin typeface="Noto Sans KR" pitchFamily="34" charset="0"/>
-                <a:ea typeface="Noto Sans KR" pitchFamily="34" charset="-122"/>
-                <a:cs typeface="Noto Sans KR" pitchFamily="34" charset="-120"/>
-              </a:rPr>
-              <a:t> </a:t>
-            </a:r>
-            <a:r>
-              <a:rPr lang="en-US" sz="1800" dirty="0" err="1">
-                <a:solidFill>
-                  <a:srgbClr val="FFFFFF"/>
-                </a:solidFill>
-                <a:latin typeface="Noto Sans KR" pitchFamily="34" charset="0"/>
-                <a:ea typeface="Noto Sans KR" pitchFamily="34" charset="-122"/>
-                <a:cs typeface="Noto Sans KR" pitchFamily="34" charset="-120"/>
-              </a:rPr>
-              <a:t>문법부터</a:t>
-            </a:r>
-            <a:r>
-              <a:rPr lang="en-US" sz="1800" dirty="0">
-                <a:solidFill>
-                  <a:srgbClr val="FFFFFF"/>
-                </a:solidFill>
-                <a:latin typeface="Noto Sans KR" pitchFamily="34" charset="0"/>
-                <a:ea typeface="Noto Sans KR" pitchFamily="34" charset="-122"/>
-                <a:cs typeface="Noto Sans KR" pitchFamily="34" charset="-120"/>
-              </a:rPr>
-              <a:t> </a:t>
-            </a:r>
-            <a:r>
-              <a:rPr lang="en-US" sz="1800" dirty="0" err="1">
-                <a:solidFill>
-                  <a:srgbClr val="FFFFFF"/>
-                </a:solidFill>
-                <a:latin typeface="Noto Sans KR" pitchFamily="34" charset="0"/>
-                <a:ea typeface="Noto Sans KR" pitchFamily="34" charset="-122"/>
-                <a:cs typeface="Noto Sans KR" pitchFamily="34" charset="-120"/>
-              </a:rPr>
-              <a:t>노션</a:t>
-            </a:r>
-            <a:r>
-              <a:rPr lang="en-US" sz="1800" dirty="0">
-                <a:solidFill>
-                  <a:srgbClr val="FFFFFF"/>
-                </a:solidFill>
-                <a:latin typeface="Noto Sans KR" pitchFamily="34" charset="0"/>
-                <a:ea typeface="Noto Sans KR" pitchFamily="34" charset="-122"/>
-                <a:cs typeface="Noto Sans KR" pitchFamily="34" charset="-120"/>
-              </a:rPr>
-              <a:t>(Notion) 활용까지 완벽하게.</a:t>
-            </a:r>
-            <a:endParaRPr lang="en-US" sz="1800" dirty="0"/>
-          </a:p>
-        </p:txBody>
-      </p:sp>
-      <p:sp>
-        <p:nvSpPr>
-          <p:cNvPr id="23" name="Shape 21">
-            <a:extLst>
-              <a:ext uri="{FF2B5EF4-FFF2-40B4-BE49-F238E27FC236}">
-                <a16:creationId xmlns:a16="http://schemas.microsoft.com/office/drawing/2014/main" id="{4B742CD2-F84F-BF8E-7B5D-87756A3B76A5}"/>
-              </a:ext>
-            </a:extLst>
-          </p:cNvPr>
-          <p:cNvSpPr/>
-          <p:nvPr/>
-        </p:nvSpPr>
-        <p:spPr>
-          <a:xfrm>
-            <a:off x="8389620" y="2644445"/>
-            <a:ext cx="3047695" cy="972007"/>
-          </a:xfrm>
-          <a:prstGeom prst="roundRect">
-            <a:avLst>
-              <a:gd name="adj" fmla="val 22135"/>
-            </a:avLst>
-          </a:prstGeom>
-          <a:solidFill>
-            <a:srgbClr val="0F172A">
-              <a:alpha val="60000"/>
-            </a:srgbClr>
-          </a:solidFill>
-          <a:ln w="12700">
-            <a:solidFill>
-              <a:srgbClr val="94A3B8">
-                <a:alpha val="10000"/>
-              </a:srgbClr>
-            </a:solidFill>
-            <a:prstDash val="solid"/>
-          </a:ln>
-        </p:spPr>
-        <p:txBody>
-          <a:bodyPr/>
-          <a:lstStyle/>
-          <a:p>
-            <a:endParaRPr lang="ko-KR" altLang="en-US"/>
-          </a:p>
-        </p:txBody>
-      </p:sp>
-      <p:sp>
-        <p:nvSpPr>
-          <p:cNvPr id="24" name="Text 22">
-            <a:extLst>
-              <a:ext uri="{FF2B5EF4-FFF2-40B4-BE49-F238E27FC236}">
-                <a16:creationId xmlns:a16="http://schemas.microsoft.com/office/drawing/2014/main" id="{638158AC-C56B-DE09-1AE9-1C8F0957640C}"/>
-              </a:ext>
-            </a:extLst>
-          </p:cNvPr>
-          <p:cNvSpPr txBox="1"/>
-          <p:nvPr/>
-        </p:nvSpPr>
-        <p:spPr>
-          <a:xfrm>
-            <a:off x="9164117" y="2882189"/>
-            <a:ext cx="1499616" cy="267005"/>
-          </a:xfrm>
-          <a:prstGeom prst="rect">
-            <a:avLst/>
-          </a:prstGeom>
-          <a:noFill/>
-          <a:ln/>
-        </p:spPr>
-        <p:txBody>
-          <a:bodyPr wrap="square" lIns="0" tIns="0" rIns="0" bIns="0" rtlCol="0" anchor="ctr"/>
-          <a:lstStyle/>
-          <a:p>
-            <a:pPr marL="0" indent="0" algn="ctr">
-              <a:buNone/>
-            </a:pPr>
-            <a:r>
-              <a:rPr lang="en-US" sz="1300" b="1" dirty="0">
-                <a:solidFill>
-                  <a:srgbClr val="FFFFFF"/>
-                </a:solidFill>
-                <a:latin typeface="Noto Sans KR" pitchFamily="34" charset="0"/>
-                <a:ea typeface="Noto Sans KR" pitchFamily="34" charset="-122"/>
-                <a:cs typeface="Noto Sans KR" pitchFamily="34" charset="-120"/>
-              </a:rPr>
-              <a:t>기본 문법과 원리</a:t>
-            </a:r>
-            <a:endParaRPr lang="en-US" sz="1300" dirty="0"/>
-          </a:p>
-        </p:txBody>
-      </p:sp>
-      <p:sp>
-        <p:nvSpPr>
-          <p:cNvPr id="25" name="Text 23">
-            <a:extLst>
-              <a:ext uri="{FF2B5EF4-FFF2-40B4-BE49-F238E27FC236}">
-                <a16:creationId xmlns:a16="http://schemas.microsoft.com/office/drawing/2014/main" id="{F113DAD9-19EA-44D7-E1BC-B8D7122DD390}"/>
-              </a:ext>
-            </a:extLst>
-          </p:cNvPr>
-          <p:cNvSpPr txBox="1"/>
-          <p:nvPr/>
-        </p:nvSpPr>
-        <p:spPr>
-          <a:xfrm>
-            <a:off x="8823960" y="3187598"/>
-            <a:ext cx="2181758" cy="191110"/>
-          </a:xfrm>
-          <a:prstGeom prst="rect">
-            <a:avLst/>
-          </a:prstGeom>
-          <a:noFill/>
-          <a:ln/>
-        </p:spPr>
-        <p:txBody>
-          <a:bodyPr wrap="square" lIns="0" tIns="0" rIns="0" bIns="0" rtlCol="0" anchor="ctr"/>
-          <a:lstStyle/>
-          <a:p>
-            <a:pPr marL="0" indent="0" algn="ctr">
-              <a:buNone/>
-            </a:pPr>
-            <a:r>
-              <a:rPr lang="en-US" sz="1000" dirty="0">
-                <a:solidFill>
-                  <a:srgbClr val="FFFFFF"/>
-                </a:solidFill>
-                <a:latin typeface="Noto Sans KR" pitchFamily="34" charset="0"/>
-                <a:ea typeface="Noto Sans KR" pitchFamily="34" charset="-122"/>
-                <a:cs typeface="Noto Sans KR" pitchFamily="34" charset="-120"/>
-              </a:rPr>
-              <a:t>핵심 태그 • 구조화 • 미니 실습</a:t>
-            </a:r>
-            <a:endParaRPr lang="en-US" sz="1000" dirty="0"/>
-          </a:p>
-        </p:txBody>
-      </p:sp>
-      <p:sp>
-        <p:nvSpPr>
-          <p:cNvPr id="26" name="Shape 24">
-            <a:extLst>
-              <a:ext uri="{FF2B5EF4-FFF2-40B4-BE49-F238E27FC236}">
-                <a16:creationId xmlns:a16="http://schemas.microsoft.com/office/drawing/2014/main" id="{42F4CBD0-76DC-8307-2A67-7EEA2C58B41C}"/>
-              </a:ext>
-            </a:extLst>
-          </p:cNvPr>
-          <p:cNvSpPr/>
-          <p:nvPr/>
-        </p:nvSpPr>
-        <p:spPr>
-          <a:xfrm>
-            <a:off x="8466430" y="3717036"/>
-            <a:ext cx="3047695" cy="972007"/>
-          </a:xfrm>
-          <a:prstGeom prst="roundRect">
-            <a:avLst>
-              <a:gd name="adj" fmla="val 22135"/>
-            </a:avLst>
-          </a:prstGeom>
-          <a:solidFill>
-            <a:srgbClr val="0F172A">
-              <a:alpha val="60000"/>
-            </a:srgbClr>
-          </a:solidFill>
-          <a:ln w="12700">
-            <a:solidFill>
-              <a:srgbClr val="94A3B8">
-                <a:alpha val="10000"/>
-              </a:srgbClr>
-            </a:solidFill>
-            <a:prstDash val="solid"/>
-          </a:ln>
-        </p:spPr>
-        <p:txBody>
-          <a:bodyPr/>
-          <a:lstStyle/>
-          <a:p>
-            <a:endParaRPr lang="ko-KR" altLang="en-US"/>
-          </a:p>
-        </p:txBody>
-      </p:sp>
-      <p:sp>
-        <p:nvSpPr>
-          <p:cNvPr id="27" name="Text 25">
-            <a:extLst>
-              <a:ext uri="{FF2B5EF4-FFF2-40B4-BE49-F238E27FC236}">
-                <a16:creationId xmlns:a16="http://schemas.microsoft.com/office/drawing/2014/main" id="{4C8457F7-3F5B-C9BF-A70F-FE17C1B5D978}"/>
-              </a:ext>
-            </a:extLst>
-          </p:cNvPr>
-          <p:cNvSpPr txBox="1"/>
-          <p:nvPr/>
-        </p:nvSpPr>
-        <p:spPr>
-          <a:xfrm>
-            <a:off x="8823960" y="3954780"/>
-            <a:ext cx="2229307" cy="267005"/>
-          </a:xfrm>
-          <a:prstGeom prst="rect">
-            <a:avLst/>
-          </a:prstGeom>
-          <a:noFill/>
-          <a:ln/>
-        </p:spPr>
-        <p:txBody>
-          <a:bodyPr wrap="square" lIns="0" tIns="0" rIns="0" bIns="0" rtlCol="0" anchor="ctr"/>
-          <a:lstStyle/>
-          <a:p>
-            <a:pPr marL="0" indent="0" algn="ctr">
-              <a:buNone/>
-            </a:pPr>
-            <a:r>
-              <a:rPr lang="en-US" sz="1300" b="1" dirty="0">
-                <a:solidFill>
-                  <a:srgbClr val="FFFFFF"/>
-                </a:solidFill>
-                <a:latin typeface="Noto Sans KR" pitchFamily="34" charset="0"/>
-                <a:ea typeface="Noto Sans KR" pitchFamily="34" charset="-122"/>
-                <a:cs typeface="Noto Sans KR" pitchFamily="34" charset="-120"/>
-              </a:rPr>
-              <a:t>실전 활용 &amp; </a:t>
-            </a:r>
-            <a:r>
-              <a:rPr lang="en-US" sz="1300" b="1" dirty="0" err="1">
-                <a:solidFill>
-                  <a:srgbClr val="FFFFFF"/>
-                </a:solidFill>
-                <a:latin typeface="Noto Sans KR" pitchFamily="34" charset="0"/>
-                <a:ea typeface="Noto Sans KR" pitchFamily="34" charset="-122"/>
-                <a:cs typeface="Noto Sans KR" pitchFamily="34" charset="-120"/>
-              </a:rPr>
-              <a:t>노션</a:t>
-            </a:r>
-            <a:r>
-              <a:rPr lang="en-US" sz="1300" b="1" dirty="0">
-                <a:solidFill>
-                  <a:srgbClr val="FFFFFF"/>
-                </a:solidFill>
-                <a:latin typeface="Noto Sans KR" pitchFamily="34" charset="0"/>
-                <a:ea typeface="Noto Sans KR" pitchFamily="34" charset="-122"/>
-                <a:cs typeface="Noto Sans KR" pitchFamily="34" charset="-120"/>
-              </a:rPr>
-              <a:t> &amp; </a:t>
-            </a:r>
-            <a:r>
-              <a:rPr lang="en-US" sz="1300" b="1" dirty="0" err="1">
-                <a:solidFill>
-                  <a:srgbClr val="FFFFFF"/>
-                </a:solidFill>
-                <a:latin typeface="Noto Sans KR" pitchFamily="34" charset="0"/>
-                <a:ea typeface="Noto Sans KR" pitchFamily="34" charset="-122"/>
-                <a:cs typeface="Noto Sans KR" pitchFamily="34" charset="-120"/>
-              </a:rPr>
-              <a:t>Github</a:t>
-            </a:r>
-            <a:endParaRPr lang="en-US" sz="1300" dirty="0"/>
-          </a:p>
-        </p:txBody>
-      </p:sp>
-      <p:sp>
-        <p:nvSpPr>
-          <p:cNvPr id="28" name="Text 26">
-            <a:extLst>
-              <a:ext uri="{FF2B5EF4-FFF2-40B4-BE49-F238E27FC236}">
-                <a16:creationId xmlns:a16="http://schemas.microsoft.com/office/drawing/2014/main" id="{1A49B593-6967-0D05-4284-67A9CA9A9ADE}"/>
-              </a:ext>
-            </a:extLst>
-          </p:cNvPr>
-          <p:cNvSpPr txBox="1"/>
-          <p:nvPr/>
-        </p:nvSpPr>
-        <p:spPr>
-          <a:xfrm>
-            <a:off x="8967521" y="4259275"/>
-            <a:ext cx="2054657" cy="191110"/>
-          </a:xfrm>
-          <a:prstGeom prst="rect">
-            <a:avLst/>
-          </a:prstGeom>
-          <a:noFill/>
-          <a:ln/>
-        </p:spPr>
-        <p:txBody>
-          <a:bodyPr wrap="square" lIns="0" tIns="0" rIns="0" bIns="0" rtlCol="0" anchor="ctr"/>
-          <a:lstStyle/>
-          <a:p>
-            <a:pPr marL="0" indent="0" algn="ctr">
-              <a:buNone/>
-            </a:pPr>
-            <a:r>
-              <a:rPr lang="en-US" sz="1000" dirty="0">
-                <a:solidFill>
-                  <a:srgbClr val="FFFFFF"/>
-                </a:solidFill>
-                <a:latin typeface="Noto Sans KR" pitchFamily="34" charset="0"/>
-                <a:ea typeface="Noto Sans KR" pitchFamily="34" charset="-122"/>
-                <a:cs typeface="Noto Sans KR" pitchFamily="34" charset="-120"/>
-              </a:rPr>
-              <a:t>README • 호환성 • 포트폴리오</a:t>
-            </a:r>
-            <a:endParaRPr lang="en-US" sz="1000" dirty="0"/>
-          </a:p>
-        </p:txBody>
-      </p:sp>
-      <p:grpSp>
-        <p:nvGrpSpPr>
-          <p:cNvPr id="32" name="그룹 31">
-            <a:extLst>
-              <a:ext uri="{FF2B5EF4-FFF2-40B4-BE49-F238E27FC236}">
-                <a16:creationId xmlns:a16="http://schemas.microsoft.com/office/drawing/2014/main" id="{618BDF89-DF6B-4041-BD44-CA2646BB6586}"/>
-              </a:ext>
-            </a:extLst>
-          </p:cNvPr>
-          <p:cNvGrpSpPr/>
-          <p:nvPr/>
-        </p:nvGrpSpPr>
-        <p:grpSpPr>
-          <a:xfrm>
-            <a:off x="7367780" y="5664707"/>
-            <a:ext cx="4172404" cy="425653"/>
-            <a:chOff x="7367780" y="5664707"/>
-            <a:chExt cx="4172404" cy="425653"/>
-          </a:xfrm>
-        </p:grpSpPr>
-        <p:sp>
-          <p:nvSpPr>
-            <p:cNvPr id="29" name="Shape 5">
-              <a:extLst>
-                <a:ext uri="{FF2B5EF4-FFF2-40B4-BE49-F238E27FC236}">
-                  <a16:creationId xmlns:a16="http://schemas.microsoft.com/office/drawing/2014/main" id="{1F886454-A0E0-EAC7-22E9-1FE1A326D60E}"/>
-                </a:ext>
-              </a:extLst>
-            </p:cNvPr>
-            <p:cNvSpPr/>
-            <p:nvPr/>
-          </p:nvSpPr>
-          <p:spPr>
-            <a:xfrm>
-              <a:off x="7367780" y="5709055"/>
-              <a:ext cx="381305" cy="381305"/>
-            </a:xfrm>
-            <a:prstGeom prst="ellipse">
-              <a:avLst/>
-            </a:prstGeom>
-            <a:solidFill>
-              <a:srgbClr val="38BDF8">
-                <a:alpha val="10000"/>
-              </a:srgbClr>
-            </a:solidFill>
-            <a:ln/>
-          </p:spPr>
-          <p:txBody>
-            <a:bodyPr/>
-            <a:lstStyle/>
-            <a:p>
-              <a:endParaRPr lang="ko-KR" altLang="en-US"/>
-            </a:p>
-          </p:txBody>
-        </p:sp>
-        <p:pic>
-          <p:nvPicPr>
-            <p:cNvPr id="30" name="Image 2" descr="preencoded.png">
-              <a:extLst>
-                <a:ext uri="{FF2B5EF4-FFF2-40B4-BE49-F238E27FC236}">
-                  <a16:creationId xmlns:a16="http://schemas.microsoft.com/office/drawing/2014/main" id="{569001CD-4471-4299-DA75-5831C2C545D1}"/>
-                </a:ext>
-              </a:extLst>
-            </p:cNvPr>
-            <p:cNvPicPr>
-              <a:picLocks noChangeAspect="1"/>
-            </p:cNvPicPr>
-            <p:nvPr/>
-          </p:nvPicPr>
-          <p:blipFill>
-            <a:blip r:embed="rId3"/>
-            <a:srcRect l="-1064" r="-1064"/>
-            <a:stretch/>
-          </p:blipFill>
-          <p:spPr>
-            <a:xfrm>
-              <a:off x="7448248" y="5814211"/>
-              <a:ext cx="219456" cy="171907"/>
-            </a:xfrm>
-            <a:prstGeom prst="rect">
-              <a:avLst/>
-            </a:prstGeom>
-          </p:spPr>
-        </p:pic>
-        <p:sp>
-          <p:nvSpPr>
-            <p:cNvPr id="31" name="Text 11">
-              <a:extLst>
-                <a:ext uri="{FF2B5EF4-FFF2-40B4-BE49-F238E27FC236}">
-                  <a16:creationId xmlns:a16="http://schemas.microsoft.com/office/drawing/2014/main" id="{D0C905CA-6F95-5289-4B91-E705E57F91E4}"/>
-                </a:ext>
-              </a:extLst>
-            </p:cNvPr>
-            <p:cNvSpPr txBox="1"/>
-            <p:nvPr/>
-          </p:nvSpPr>
-          <p:spPr>
-            <a:xfrm>
-              <a:off x="7901787" y="5664707"/>
-              <a:ext cx="3638397" cy="366675"/>
-            </a:xfrm>
-            <a:prstGeom prst="rect">
-              <a:avLst/>
-            </a:prstGeom>
-            <a:noFill/>
-            <a:ln/>
-          </p:spPr>
-          <p:txBody>
-            <a:bodyPr wrap="square" lIns="0" tIns="0" rIns="0" bIns="0" rtlCol="0" anchor="ctr"/>
-            <a:lstStyle/>
-            <a:p>
-              <a:pPr>
-                <a:lnSpc>
-                  <a:spcPct val="150000"/>
-                </a:lnSpc>
-              </a:pPr>
-              <a:r>
-                <a:rPr lang="ko-KR" altLang="en-US" sz="2000" b="1" dirty="0">
-                  <a:solidFill>
-                    <a:srgbClr val="FFFFFF"/>
-                  </a:solidFill>
-                  <a:latin typeface="Noto Sans KR" pitchFamily="34" charset="0"/>
-                  <a:ea typeface="Noto Sans KR" pitchFamily="34" charset="-122"/>
-                </a:rPr>
-                <a:t>이 애 본</a:t>
-              </a:r>
-              <a:br>
-                <a:rPr lang="en-US" altLang="ko-KR" sz="1500" b="1" dirty="0">
-                  <a:solidFill>
-                    <a:srgbClr val="FFFFFF"/>
-                  </a:solidFill>
-                  <a:latin typeface="Noto Sans KR" pitchFamily="34" charset="0"/>
-                  <a:ea typeface="Noto Sans KR" pitchFamily="34" charset="-122"/>
-                </a:rPr>
-              </a:br>
-              <a:r>
-                <a:rPr lang="ko-KR" altLang="en-US" sz="1500" b="1" dirty="0">
-                  <a:solidFill>
-                    <a:srgbClr val="FFFFFF"/>
-                  </a:solidFill>
-                  <a:latin typeface="Noto Sans KR" pitchFamily="34" charset="0"/>
-                  <a:ea typeface="Noto Sans KR" pitchFamily="34" charset="-122"/>
-                </a:rPr>
-                <a:t>한신대학교 </a:t>
-              </a:r>
-              <a:r>
-                <a:rPr lang="en-US" altLang="ko-KR" sz="1500" b="1" dirty="0">
-                  <a:solidFill>
-                    <a:srgbClr val="FFFFFF"/>
-                  </a:solidFill>
-                  <a:latin typeface="Noto Sans KR" pitchFamily="34" charset="0"/>
-                  <a:ea typeface="Noto Sans KR" pitchFamily="34" charset="-122"/>
-                </a:rPr>
-                <a:t>AI.SW</a:t>
-              </a:r>
-              <a:r>
-                <a:rPr lang="ko-KR" altLang="en-US" sz="1500" b="1" dirty="0">
-                  <a:solidFill>
-                    <a:srgbClr val="FFFFFF"/>
-                  </a:solidFill>
-                  <a:latin typeface="Noto Sans KR" pitchFamily="34" charset="0"/>
-                  <a:ea typeface="Noto Sans KR" pitchFamily="34" charset="-122"/>
-                </a:rPr>
-                <a:t>대학 </a:t>
-              </a:r>
-              <a:r>
-                <a:rPr lang="en-US" altLang="ko-KR" sz="1500" b="1" dirty="0">
-                  <a:solidFill>
-                    <a:srgbClr val="FFFFFF"/>
-                  </a:solidFill>
-                  <a:latin typeface="Noto Sans KR" pitchFamily="34" charset="0"/>
-                  <a:ea typeface="Noto Sans KR" pitchFamily="34" charset="-122"/>
-                  <a:hlinkClick r:id="rId4"/>
-                </a:rPr>
-                <a:t>aebon@hs.ac.kr</a:t>
-              </a:r>
-              <a:r>
-                <a:rPr lang="ko-KR" altLang="en-US" sz="1500" b="1" dirty="0">
-                  <a:solidFill>
-                    <a:srgbClr val="FFFFFF"/>
-                  </a:solidFill>
-                  <a:latin typeface="Noto Sans KR" pitchFamily="34" charset="0"/>
-                  <a:ea typeface="Noto Sans KR" pitchFamily="34" charset="-122"/>
-                </a:rPr>
-                <a:t> </a:t>
-              </a:r>
-              <a:endParaRPr lang="en-US" altLang="ko-KR" sz="1500" b="1" dirty="0">
-                <a:solidFill>
-                  <a:srgbClr val="FFFFFF"/>
-                </a:solidFill>
-                <a:latin typeface="Noto Sans KR" pitchFamily="34" charset="0"/>
-                <a:ea typeface="Noto Sans KR" pitchFamily="34" charset="-122"/>
-              </a:endParaRPr>
-            </a:p>
-          </p:txBody>
-        </p:sp>
-      </p:grpSp>
-      <p:sp>
-        <p:nvSpPr>
-          <p:cNvPr id="33" name="deckgen:wrap:footer"/>
-          <p:cNvSpPr txBox="1"/>
-          <p:nvPr/>
-        </p:nvSpPr>
-        <p:spPr>
-          <a:xfrm>
-            <a:off x="365760" y="6549390"/>
-            <a:ext cx="11460480" cy="240030"/>
-          </a:xfrm>
-          <a:prstGeom prst="rect">
-            <a:avLst/>
-          </a:prstGeom>
-          <a:noFill/>
-        </p:spPr>
-        <p:txBody>
-          <a:bodyPr wrap="square" anchor="b" lIns="0" rIns="0" tIns="0" bIns="0">
-            <a:spAutoFit/>
-          </a:bodyPr>
-          <a:lstStyle/>
-          <a:p>
-            <a:pPr algn="r">
-              <a:lnSpc>
-                <a:spcPct val="125000"/>
-              </a:lnSpc>
-            </a:pPr>
-            <a:r>
-              <a:rPr sz="900" b="0">
-                <a:solidFill>
-                  <a:srgbClr val="8A8F99"/>
-                </a:solidFill>
-                <a:latin typeface="Pretendard"/>
-              </a:rPr>
-              <a:t>© 2026 이애본(드림아이티비즈) · useful-ai.dreamitbiz.com · 교육 목적 비영리 이용 · 출처 표기</a:t>
-            </a:r>
-          </a:p>
-        </p:txBody>
-      </p:sp>
-    </p:spTree>
-    <p:extLst>
-      <p:ext uri="{BB962C8B-B14F-4D97-AF65-F5344CB8AC3E}">
-        <p14:creationId xmlns:p14="http://schemas.microsoft.com/office/powerpoint/2010/main" val="1442286099"/>
-      </p:ext>
-    </p:extLst>
-  </p:cSld>
-  <p:clrMapOvr>
-    <a:masterClrMapping/>
-  </p:clrMapOvr>
-</p:sld>
-</file>
-
-<file path=ppt/slides/slide12.xml><?xml version="1.0" encoding="utf-8"?>
 <p:sld xmlns:a="http://schemas.openxmlformats.org/drawingml/2006/main" xmlns:r="http://schemas.openxmlformats.org/officeDocument/2006/relationships" xmlns:p="http://schemas.openxmlformats.org/presentationml/2006/main">
   <p:cSld name="Slide 11">
     <p:spTree>
@@ -7518,7 +5807,7 @@
                 </a:solidFill>
                 <a:latin typeface="Pretendard"/>
               </a:rPr>
-              <a:t>© 2026 이애본(드림아이티비즈) · useful-ai.dreamitbiz.com · 교육 목적 비영리 이용 · 출처 표기</a:t>
+              <a:t>© 2026 이애본 · 홍문원(洪文院) 발행 · CC BY-NC-ND 4.0 · useful-ai.dreamitbiz.com</a:t>
             </a:r>
           </a:p>
         </p:txBody>
@@ -7531,7 +5820,7 @@
 </p:sld>
 </file>
 
-<file path=ppt/slides/slide13.xml><?xml version="1.0" encoding="utf-8"?>
+<file path=ppt/slides/slide12.xml><?xml version="1.0" encoding="utf-8"?>
 <p:sld xmlns:a="http://schemas.openxmlformats.org/drawingml/2006/main" xmlns:r="http://schemas.openxmlformats.org/officeDocument/2006/relationships" xmlns:p="http://schemas.openxmlformats.org/presentationml/2006/main">
   <p:cSld name="Slide 12">
     <p:spTree>
@@ -9992,7 +8281,7 @@
                 </a:solidFill>
                 <a:latin typeface="Pretendard"/>
               </a:rPr>
-              <a:t>© 2026 이애본(드림아이티비즈) · useful-ai.dreamitbiz.com · 교육 목적 비영리 이용 · 출처 표기</a:t>
+              <a:t>© 2026 이애본 · 홍문원(洪文院) 발행 · CC BY-NC-ND 4.0 · useful-ai.dreamitbiz.com</a:t>
             </a:r>
           </a:p>
         </p:txBody>
@@ -10005,7 +8294,7 @@
 </p:sld>
 </file>
 
-<file path=ppt/slides/slide14.xml><?xml version="1.0" encoding="utf-8"?>
+<file path=ppt/slides/slide13.xml><?xml version="1.0" encoding="utf-8"?>
 <p:sld xmlns:a="http://schemas.openxmlformats.org/drawingml/2006/main" xmlns:r="http://schemas.openxmlformats.org/officeDocument/2006/relationships" xmlns:p="http://schemas.openxmlformats.org/presentationml/2006/main">
   <p:cSld name="Slide 13">
     <p:spTree>
@@ -12128,7 +10417,7 @@
                 </a:solidFill>
                 <a:latin typeface="Pretendard"/>
               </a:rPr>
-              <a:t>© 2026 이애본(드림아이티비즈) · useful-ai.dreamitbiz.com · 교육 목적 비영리 이용 · 출처 표기</a:t>
+              <a:t>© 2026 이애본 · 홍문원(洪文院) 발행 · CC BY-NC-ND 4.0 · useful-ai.dreamitbiz.com</a:t>
             </a:r>
           </a:p>
         </p:txBody>
@@ -12141,7 +10430,7 @@
 </p:sld>
 </file>
 
-<file path=ppt/slides/slide15.xml><?xml version="1.0" encoding="utf-8"?>
+<file path=ppt/slides/slide14.xml><?xml version="1.0" encoding="utf-8"?>
 <p:sld xmlns:a="http://schemas.openxmlformats.org/drawingml/2006/main" xmlns:r="http://schemas.openxmlformats.org/officeDocument/2006/relationships" xmlns:p="http://schemas.openxmlformats.org/presentationml/2006/main">
   <p:cSld name="Slide 14">
     <p:spTree>
@@ -14538,7 +12827,7 @@
                 <a:ea typeface="Noto Sans KR" pitchFamily="34" charset="-122"/>
                 <a:cs typeface="Noto Sans KR" pitchFamily="34" charset="-120"/>
               </a:rPr>
-              <a:t>단축키를 입력하고 스페이스를 누르면바로 서식이 적용됩니다.</a:t>
+              <a:t>단축키를 입력하고 스페이스를 누르면 바로 서식이 적용됩니다.</a:t>
             </a:r>
             <a:endParaRPr lang="en-US" sz="1200" dirty="0"/>
           </a:p>
@@ -14683,7 +12972,43 @@
       </p:sp>
       <p:sp>
         <p:nvSpPr>
-          <p:cNvPr id="65" name="deckgen:wrap:footer"/>
+          <p:cNvPr id="65" name="Stage3 Note"/>
+          <p:cNvSpPr txBox="1"/>
+          <p:nvPr/>
+        </p:nvSpPr>
+        <p:spPr>
+          <a:xfrm>
+            <a:off x="5450000" y="6380000"/>
+            <a:ext cx="6250000" cy="200000"/>
+          </a:xfrm>
+          <a:prstGeom prst="rect">
+            <a:avLst/>
+          </a:prstGeom>
+          <a:noFill/>
+        </p:spPr>
+        <p:txBody>
+          <a:bodyPr wrap="square" lIns="0" rIns="0" tIns="0" bIns="0" anchor="t">
+            <a:spAutoFit/>
+          </a:bodyPr>
+          <a:lstStyle/>
+          <a:p>
+            <a:r>
+              <a:rPr sz="900">
+                <a:solidFill>
+                  <a:srgbClr val="8B95A7"/>
+                </a:solidFill>
+                <a:latin typeface="Noto Sans KR"/>
+                <a:ea typeface="Noto Sans KR"/>
+                <a:cs typeface="Noto Sans KR"/>
+              </a:rPr>
+              <a:t>메뉴 위치: 노션 도움말 「Export your content」(2026-10 기준). 화면은 업데이트로 바뀔 수 있다.</a:t>
+            </a:r>
+          </a:p>
+        </p:txBody>
+      </p:sp>
+      <p:sp>
+        <p:nvSpPr>
+          <p:cNvPr id="66" name="deckgen:wrap:footer"/>
           <p:cNvSpPr txBox="1"/>
           <p:nvPr/>
         </p:nvSpPr>
@@ -14715,7 +13040,7 @@
                 </a:solidFill>
                 <a:latin typeface="Pretendard"/>
               </a:rPr>
-              <a:t>© 2026 이애본(드림아이티비즈) · useful-ai.dreamitbiz.com · 교육 목적 비영리 이용 · 출처 표기</a:t>
+              <a:t>© 2026 이애본 · 홍문원(洪文院) 발행 · CC BY-NC-ND 4.0 · useful-ai.dreamitbiz.com</a:t>
             </a:r>
           </a:p>
         </p:txBody>
@@ -14728,7 +13053,7 @@
 </p:sld>
 </file>
 
-<file path=ppt/slides/slide16.xml><?xml version="1.0" encoding="utf-8"?>
+<file path=ppt/slides/slide15.xml><?xml version="1.0" encoding="utf-8"?>
 <p:sld xmlns:a="http://schemas.openxmlformats.org/drawingml/2006/main" xmlns:r="http://schemas.openxmlformats.org/officeDocument/2006/relationships" xmlns:p="http://schemas.openxmlformats.org/presentationml/2006/main">
   <p:cSld name="Slide 15">
     <p:spTree>
@@ -15199,7 +13524,7 @@
                 <a:ea typeface="Noto Sans KR" pitchFamily="34" charset="-122"/>
                 <a:cs typeface="Noto Sans KR" pitchFamily="34" charset="-120"/>
               </a:rPr>
-              <a:t>제목 인식 불가:</a:t>
+              <a:t>제목 인식 불가: #제목(X) → </a:t>
             </a:r>
             <a:r>
               <a:rPr lang="en-US" sz="1000" dirty="0">
@@ -15210,7 +13535,7 @@
                 <a:ea typeface="Courier New" pitchFamily="34" charset="-122"/>
                 <a:cs typeface="Courier New" pitchFamily="34" charset="-120"/>
               </a:rPr>
-              <a:t>#제목</a:t>
+              <a:t/>
             </a:r>
             <a:r>
               <a:rPr lang="en-US" sz="1200" dirty="0">
@@ -15221,7 +13546,7 @@
                 <a:ea typeface="Noto Sans KR" pitchFamily="34" charset="-122"/>
                 <a:cs typeface="Noto Sans KR" pitchFamily="34" charset="-120"/>
               </a:rPr>
-              <a:t>(X) →</a:t>
+              <a:t/>
             </a:r>
             <a:r>
               <a:rPr lang="en-US" sz="1200" dirty="0">
@@ -15653,7 +13978,7 @@
                 <a:ea typeface="Noto Sans KR" pitchFamily="34" charset="-122"/>
                 <a:cs typeface="Noto Sans KR" pitchFamily="34" charset="-120"/>
               </a:rPr>
-              <a:t>줄 길이는 60~80자 내외인가?</a:t>
+              <a:t>줄 길이는 60~80자 내외인가? (권장치)</a:t>
             </a:r>
             <a:endParaRPr lang="en-US" sz="1000" dirty="0"/>
           </a:p>
@@ -16193,7 +14518,7 @@
                 </a:solidFill>
                 <a:latin typeface="Pretendard"/>
               </a:rPr>
-              <a:t>© 2026 이애본(드림아이티비즈) · useful-ai.dreamitbiz.com · 교육 목적 비영리 이용 · 출처 표기</a:t>
+              <a:t>© 2026 이애본 · 홍문원(洪文院) 발행 · CC BY-NC-ND 4.0 · useful-ai.dreamitbiz.com</a:t>
             </a:r>
           </a:p>
         </p:txBody>
@@ -16206,7 +14531,7 @@
 </p:sld>
 </file>
 
-<file path=ppt/slides/slide17.xml><?xml version="1.0" encoding="utf-8"?>
+<file path=ppt/slides/slide16.xml><?xml version="1.0" encoding="utf-8"?>
 <p:sld xmlns:a="http://schemas.openxmlformats.org/drawingml/2006/main" xmlns:r="http://schemas.openxmlformats.org/officeDocument/2006/relationships" xmlns:p="http://schemas.openxmlformats.org/presentationml/2006/main">
   <p:cSld name="Slide 16">
     <p:spTree>
@@ -18035,7 +16360,7 @@
                 </a:solidFill>
                 <a:latin typeface="Pretendard"/>
               </a:rPr>
-              <a:t>© 2026 이애본(드림아이티비즈) · useful-ai.dreamitbiz.com · 교육 목적 비영리 이용 · 출처 표기</a:t>
+              <a:t>© 2026 이애본 · 홍문원(洪文院) 발행 · CC BY-NC-ND 4.0 · useful-ai.dreamitbiz.com</a:t>
             </a:r>
           </a:p>
         </p:txBody>
@@ -18048,7 +16373,7 @@
 </p:sld>
 </file>
 
-<file path=ppt/slides/slide18.xml><?xml version="1.0" encoding="utf-8"?>
+<file path=ppt/slides/slide17.xml><?xml version="1.0" encoding="utf-8"?>
 <p:sld xmlns:a="http://schemas.openxmlformats.org/drawingml/2006/main" xmlns:r="http://schemas.openxmlformats.org/officeDocument/2006/relationships" xmlns:p="http://schemas.openxmlformats.org/presentationml/2006/main">
   <p:cSld name="Slide 17">
     <p:spTree>
@@ -19669,7 +17994,69 @@
       </p:pic>
       <p:sp>
         <p:nvSpPr>
-          <p:cNvPr id="44" name="deckgen:wrap:footer"/>
+          <p:cNvPr id="44" name="Stage3 Note"/>
+          <p:cNvSpPr txBox="1"/>
+          <p:nvPr/>
+        </p:nvSpPr>
+        <p:spPr>
+          <a:xfrm>
+            <a:off x="1457554" y="5700000"/>
+            <a:ext cx="5300000" cy="520000"/>
+          </a:xfrm>
+          <a:prstGeom prst="rect">
+            <a:avLst/>
+          </a:prstGeom>
+          <a:noFill/>
+        </p:spPr>
+        <p:txBody>
+          <a:bodyPr wrap="square" lIns="0" rIns="0" tIns="0" bIns="0" anchor="t">
+            <a:spAutoFit/>
+          </a:bodyPr>
+          <a:lstStyle/>
+          <a:p>
+            <a:r>
+              <a:rPr sz="900">
+                <a:solidFill>
+                  <a:srgbClr val="8B95A7"/>
+                </a:solidFill>
+                <a:latin typeface="Noto Sans KR"/>
+                <a:ea typeface="Noto Sans KR"/>
+                <a:cs typeface="Noto Sans KR"/>
+              </a:rPr>
+              <a:t>GitHub: https://docs.github.com/en/get-started/writing-on-github</a:t>
+            </a:r>
+          </a:p>
+          <a:p>
+            <a:r>
+              <a:rPr sz="900">
+                <a:solidFill>
+                  <a:srgbClr val="8B95A7"/>
+                </a:solidFill>
+                <a:latin typeface="Noto Sans KR"/>
+                <a:ea typeface="Noto Sans KR"/>
+                <a:cs typeface="Noto Sans KR"/>
+              </a:rPr>
+              <a:t>CommonMark: https://spec.commonmark.org</a:t>
+            </a:r>
+          </a:p>
+          <a:p>
+            <a:r>
+              <a:rPr sz="900">
+                <a:solidFill>
+                  <a:srgbClr val="8B95A7"/>
+                </a:solidFill>
+                <a:latin typeface="Noto Sans KR"/>
+                <a:ea typeface="Noto Sans KR"/>
+                <a:cs typeface="Noto Sans KR"/>
+              </a:rPr>
+              <a:t>Notion: https://www.notion.com/help/keyboard-shortcuts</a:t>
+            </a:r>
+          </a:p>
+        </p:txBody>
+      </p:sp>
+      <p:sp>
+        <p:nvSpPr>
+          <p:cNvPr id="45" name="deckgen:wrap:footer"/>
           <p:cNvSpPr txBox="1"/>
           <p:nvPr/>
         </p:nvSpPr>
@@ -19701,7 +18088,7 @@
                 </a:solidFill>
                 <a:latin typeface="Pretendard"/>
               </a:rPr>
-              <a:t>© 2026 이애본(드림아이티비즈) · useful-ai.dreamitbiz.com · 교육 목적 비영리 이용 · 출처 표기</a:t>
+              <a:t>© 2026 이애본 · 홍문원(洪文院) 발행 · CC BY-NC-ND 4.0 · useful-ai.dreamitbiz.com</a:t>
             </a:r>
           </a:p>
         </p:txBody>
@@ -19714,7 +18101,7 @@
 </p:sld>
 </file>
 
-<file path=ppt/slides/slide19.xml><?xml version="1.0" encoding="utf-8"?>
+<file path=ppt/slides/slide18.xml><?xml version="1.0" encoding="utf-8"?>
 <p:sld xmlns:a="http://schemas.openxmlformats.org/drawingml/2006/main" xmlns:r="http://schemas.openxmlformats.org/officeDocument/2006/relationships" xmlns:p="http://schemas.openxmlformats.org/presentationml/2006/main">
   <p:cSld name="Slide 18">
     <p:spTree>
@@ -21047,7 +19434,389 @@
                 </a:solidFill>
                 <a:latin typeface="Pretendard"/>
               </a:rPr>
-              <a:t>© 2026 이애본(드림아이티비즈) · useful-ai.dreamitbiz.com · 교육 목적 비영리 이용 · 출처 표기</a:t>
+              <a:t>© 2026 이애본 · 홍문원(洪文院) 발행 · CC BY-NC-ND 4.0 · useful-ai.dreamitbiz.com</a:t>
+            </a:r>
+          </a:p>
+        </p:txBody>
+      </p:sp>
+    </p:spTree>
+  </p:cSld>
+  <p:clrMapOvr>
+    <a:masterClrMapping/>
+  </p:clrMapOvr>
+</p:sld>
+</file>
+
+<file path=ppt/slides/slide19.xml><?xml version="1.0" encoding="utf-8"?>
+<p:sld xmlns:a="http://schemas.openxmlformats.org/drawingml/2006/main" xmlns:p="http://schemas.openxmlformats.org/presentationml/2006/main" xmlns:r="http://schemas.openxmlformats.org/officeDocument/2006/relationships">
+  <p:cSld>
+    <p:spTree>
+      <p:nvGrpSpPr>
+        <p:cNvPr id="1" name=""/>
+        <p:cNvGrpSpPr/>
+        <p:nvPr/>
+      </p:nvGrpSpPr>
+      <p:grpSpPr/>
+      <p:sp>
+        <p:nvSpPr>
+          <p:cNvPr id="2" name="deckgen:wrap:bg"/>
+          <p:cNvSpPr/>
+          <p:nvPr/>
+        </p:nvSpPr>
+        <p:spPr>
+          <a:xfrm>
+            <a:off x="0" y="0"/>
+            <a:ext cx="12192000" cy="6858000"/>
+          </a:xfrm>
+          <a:prstGeom prst="rect">
+            <a:avLst/>
+          </a:prstGeom>
+          <a:solidFill>
+            <a:srgbClr val="FFFFFF"/>
+          </a:solidFill>
+          <a:ln>
+            <a:noFill/>
+          </a:ln>
+          <a:effectLst/>
+        </p:spPr>
+        <p:style>
+          <a:lnRef idx="1">
+            <a:schemeClr val="accent1"/>
+          </a:lnRef>
+          <a:fillRef idx="3">
+            <a:schemeClr val="accent1"/>
+          </a:fillRef>
+          <a:effectRef idx="2">
+            <a:schemeClr val="accent1"/>
+          </a:effectRef>
+          <a:fontRef idx="minor">
+            <a:schemeClr val="lt1"/>
+          </a:fontRef>
+        </p:style>
+        <p:txBody>
+          <a:bodyPr rtlCol="0" anchor="ctr"/>
+          <a:lstStyle/>
+          <a:p>
+            <a:pPr algn="ctr"/>
+          </a:p>
+        </p:txBody>
+      </p:sp>
+      <p:sp>
+        <p:nvSpPr>
+          <p:cNvPr id="3" name="deckgen:wrap:side"/>
+          <p:cNvSpPr/>
+          <p:nvPr/>
+        </p:nvSpPr>
+        <p:spPr>
+          <a:xfrm>
+            <a:off x="0" y="0"/>
+            <a:ext cx="146304" cy="6858000"/>
+          </a:xfrm>
+          <a:prstGeom prst="rect">
+            <a:avLst/>
+          </a:prstGeom>
+          <a:solidFill>
+            <a:srgbClr val="0072CE"/>
+          </a:solidFill>
+          <a:ln>
+            <a:noFill/>
+          </a:ln>
+          <a:effectLst/>
+        </p:spPr>
+        <p:style>
+          <a:lnRef idx="1">
+            <a:schemeClr val="accent1"/>
+          </a:lnRef>
+          <a:fillRef idx="3">
+            <a:schemeClr val="accent1"/>
+          </a:fillRef>
+          <a:effectRef idx="2">
+            <a:schemeClr val="accent1"/>
+          </a:effectRef>
+          <a:fontRef idx="minor">
+            <a:schemeClr val="lt1"/>
+          </a:fontRef>
+        </p:style>
+        <p:txBody>
+          <a:bodyPr rtlCol="0" anchor="ctr"/>
+          <a:lstStyle/>
+          <a:p>
+            <a:pPr algn="ctr"/>
+          </a:p>
+        </p:txBody>
+      </p:sp>
+      <p:sp>
+        <p:nvSpPr>
+          <p:cNvPr id="4" name="deckgen:wrap:rule"/>
+          <p:cNvSpPr/>
+          <p:nvPr/>
+        </p:nvSpPr>
+        <p:spPr>
+          <a:xfrm>
+            <a:off x="853440" y="2057400"/>
+            <a:ext cx="975360" cy="38100"/>
+          </a:xfrm>
+          <a:prstGeom prst="rect">
+            <a:avLst/>
+          </a:prstGeom>
+          <a:solidFill>
+            <a:srgbClr val="0072CE"/>
+          </a:solidFill>
+          <a:ln>
+            <a:noFill/>
+          </a:ln>
+          <a:effectLst/>
+        </p:spPr>
+        <p:style>
+          <a:lnRef idx="1">
+            <a:schemeClr val="accent1"/>
+          </a:lnRef>
+          <a:fillRef idx="3">
+            <a:schemeClr val="accent1"/>
+          </a:fillRef>
+          <a:effectRef idx="2">
+            <a:schemeClr val="accent1"/>
+          </a:effectRef>
+          <a:fontRef idx="minor">
+            <a:schemeClr val="lt1"/>
+          </a:fontRef>
+        </p:style>
+        <p:txBody>
+          <a:bodyPr rtlCol="0" anchor="ctr"/>
+          <a:lstStyle/>
+          <a:p>
+            <a:pPr algn="ctr"/>
+          </a:p>
+        </p:txBody>
+      </p:sp>
+      <p:sp>
+        <p:nvSpPr>
+          <p:cNvPr id="5" name="deckgen:wrap:eyebrow"/>
+          <p:cNvSpPr txBox="1"/>
+          <p:nvPr/>
+        </p:nvSpPr>
+        <p:spPr>
+          <a:xfrm>
+            <a:off x="853440" y="1165860"/>
+            <a:ext cx="10485120" cy="342900"/>
+          </a:xfrm>
+          <a:prstGeom prst="rect">
+            <a:avLst/>
+          </a:prstGeom>
+          <a:noFill/>
+        </p:spPr>
+        <p:txBody>
+          <a:bodyPr wrap="square" anchor="t" lIns="0" rIns="0" tIns="0" bIns="0">
+            <a:spAutoFit/>
+          </a:bodyPr>
+          <a:lstStyle/>
+          <a:p>
+            <a:pPr algn="l">
+              <a:lnSpc>
+                <a:spcPct val="125000"/>
+              </a:lnSpc>
+            </a:pPr>
+            <a:r>
+              <a:rPr sz="1200" b="1">
+                <a:solidFill>
+                  <a:srgbClr val="0072CE"/>
+                </a:solidFill>
+                <a:latin typeface="Pretendard"/>
+              </a:rPr>
+              <a:t>HOW TO USE</a:t>
+            </a:r>
+          </a:p>
+        </p:txBody>
+      </p:sp>
+      <p:sp>
+        <p:nvSpPr>
+          <p:cNvPr id="6" name="deckgen:wrap:title"/>
+          <p:cNvSpPr txBox="1"/>
+          <p:nvPr/>
+        </p:nvSpPr>
+        <p:spPr>
+          <a:xfrm>
+            <a:off x="853440" y="1440180"/>
+            <a:ext cx="10485120" cy="617220"/>
+          </a:xfrm>
+          <a:prstGeom prst="rect">
+            <a:avLst/>
+          </a:prstGeom>
+          <a:noFill/>
+        </p:spPr>
+        <p:txBody>
+          <a:bodyPr wrap="square" anchor="t" lIns="0" rIns="0" tIns="0" bIns="0">
+            <a:spAutoFit/>
+          </a:bodyPr>
+          <a:lstStyle/>
+          <a:p>
+            <a:pPr algn="l">
+              <a:lnSpc>
+                <a:spcPct val="125000"/>
+              </a:lnSpc>
+            </a:pPr>
+            <a:r>
+              <a:rPr sz="3000" b="1">
+                <a:solidFill>
+                  <a:srgbClr val="1A2A5E"/>
+                </a:solidFill>
+                <a:latin typeface="Pretendard"/>
+              </a:rPr>
+              <a:t>이 자료 사용 방법</a:t>
+            </a:r>
+          </a:p>
+        </p:txBody>
+      </p:sp>
+      <p:sp>
+        <p:nvSpPr>
+          <p:cNvPr id="7" name="deckgen:wrap:body"/>
+          <p:cNvSpPr txBox="1"/>
+          <p:nvPr/>
+        </p:nvSpPr>
+        <p:spPr>
+          <a:xfrm>
+            <a:off x="853440" y="2400300"/>
+            <a:ext cx="10485120" cy="3566160"/>
+          </a:xfrm>
+          <a:prstGeom prst="rect">
+            <a:avLst/>
+          </a:prstGeom>
+          <a:noFill/>
+        </p:spPr>
+        <p:txBody>
+          <a:bodyPr wrap="square" anchor="t" lIns="0" rIns="0" tIns="0" bIns="0">
+            <a:spAutoFit/>
+          </a:bodyPr>
+          <a:lstStyle/>
+          <a:p>
+            <a:pPr algn="l">
+              <a:lnSpc>
+                <a:spcPct val="130000"/>
+              </a:lnSpc>
+            </a:pPr>
+            <a:r>
+              <a:rPr sz="1500" b="0">
+                <a:solidFill>
+                  <a:srgbClr val="333333"/>
+                </a:solidFill>
+                <a:latin typeface="Pretendard"/>
+              </a:rPr>
+              <a:t>1.  수업·강의·자습에 그대로 쓰셔도 됩니다. 출처만 남겨 주세요.</a:t>
+            </a:r>
+          </a:p>
+          <a:p>
+            <a:pPr algn="l">
+              <a:lnSpc>
+                <a:spcPct val="130000"/>
+              </a:lnSpc>
+              <a:spcBef>
+                <a:spcPts val="900"/>
+              </a:spcBef>
+            </a:pPr>
+            <a:r>
+              <a:rPr sz="1500" b="0">
+                <a:solidFill>
+                  <a:srgbClr val="333333"/>
+                </a:solidFill>
+                <a:latin typeface="Pretendard"/>
+              </a:rPr>
+              <a:t>2.  PDF 는 화면으로 읽는 용도, PPTX 는 발표용입니다. PPTX 는 Pretendard 글꼴이 설치된 컴퓨터에서 가장 똑같이 보입니다.</a:t>
+            </a:r>
+          </a:p>
+          <a:p>
+            <a:pPr algn="l">
+              <a:lnSpc>
+                <a:spcPct val="130000"/>
+              </a:lnSpc>
+              <a:spcBef>
+                <a:spcPts val="900"/>
+              </a:spcBef>
+            </a:pPr>
+            <a:r>
+              <a:rPr sz="1500" b="0">
+                <a:solidFill>
+                  <a:srgbClr val="333333"/>
+                </a:solidFill>
+                <a:latin typeface="Pretendard"/>
+              </a:rPr>
+              <a:t>3.  출처 표기 예: 이애본(드림아이티비즈), 「자료 제목」, 홍문원, useful-ai.dreamitbiz.com, CC BY-NC-ND 4.0</a:t>
+            </a:r>
+          </a:p>
+          <a:p>
+            <a:pPr algn="l">
+              <a:lnSpc>
+                <a:spcPct val="130000"/>
+              </a:lnSpc>
+              <a:spcBef>
+                <a:spcPts val="900"/>
+              </a:spcBef>
+            </a:pPr>
+            <a:r>
+              <a:rPr sz="1500" b="0">
+                <a:solidFill>
+                  <a:srgbClr val="333333"/>
+                </a:solidFill>
+                <a:latin typeface="Pretendard"/>
+              </a:rPr>
+              <a:t>4.  자료 안의 프롬프트는 복사해 바로 쓸 수 있습니다. [대괄호]만 내 상황으로 바꾸세요.</a:t>
+            </a:r>
+          </a:p>
+          <a:p>
+            <a:pPr algn="l">
+              <a:lnSpc>
+                <a:spcPct val="130000"/>
+              </a:lnSpc>
+              <a:spcBef>
+                <a:spcPts val="900"/>
+              </a:spcBef>
+            </a:pPr>
+            <a:r>
+              <a:rPr sz="1500" b="0">
+                <a:solidFill>
+                  <a:srgbClr val="333333"/>
+                </a:solidFill>
+                <a:latin typeface="Pretendard"/>
+              </a:rPr>
+              <a:t>5.  모든 자료와 영상 강의는 useful-ai.dreamitbiz.com 에서 다시 받을 수 있습니다.</a:t>
+            </a:r>
+          </a:p>
+        </p:txBody>
+      </p:sp>
+      <p:sp>
+        <p:nvSpPr>
+          <p:cNvPr id="8" name="deckgen:wrap:footer"/>
+          <p:cNvSpPr txBox="1"/>
+          <p:nvPr/>
+        </p:nvSpPr>
+        <p:spPr>
+          <a:xfrm>
+            <a:off x="853440" y="6240780"/>
+            <a:ext cx="10485120" cy="342900"/>
+          </a:xfrm>
+          <a:prstGeom prst="rect">
+            <a:avLst/>
+          </a:prstGeom>
+          <a:noFill/>
+        </p:spPr>
+        <p:txBody>
+          <a:bodyPr wrap="square" anchor="t" lIns="0" rIns="0" tIns="0" bIns="0">
+            <a:spAutoFit/>
+          </a:bodyPr>
+          <a:lstStyle/>
+          <a:p>
+            <a:pPr algn="r">
+              <a:lnSpc>
+                <a:spcPct val="125000"/>
+              </a:lnSpc>
+            </a:pPr>
+            <a:r>
+              <a:rPr sz="900" b="0">
+                <a:solidFill>
+                  <a:srgbClr val="888888"/>
+                </a:solidFill>
+                <a:latin typeface="Pretendard"/>
+              </a:rPr>
+              <a:t>© 2026 이애본 · 홍문원(洪文院) 발행 · CC BY-NC-ND 4.0 · useful-ai.dreamitbiz.com</a:t>
             </a:r>
           </a:p>
         </p:txBody>
@@ -22041,7 +20810,7 @@
                 <a:ea typeface="Noto Sans KR" pitchFamily="34" charset="-122"/>
                 <a:cs typeface="Noto Sans KR" pitchFamily="34" charset="-120"/>
               </a:rPr>
-              <a:t>진행 타임박스</a:t>
+              <a:t>진행 구성</a:t>
             </a:r>
             <a:endParaRPr lang="en-US" sz="1800" dirty="0"/>
           </a:p>
@@ -22554,7 +21323,7 @@
                 </a:solidFill>
                 <a:latin typeface="Pretendard"/>
               </a:rPr>
-              <a:t>© 2026 이애본(드림아이티비즈) · useful-ai.dreamitbiz.com · 교육 목적 비영리 이용 · 출처 표기</a:t>
+              <a:t>© 2026 이애본 · 홍문원(洪文院) 발행 · CC BY-NC-ND 4.0 · useful-ai.dreamitbiz.com</a:t>
             </a:r>
           </a:p>
         </p:txBody>
@@ -22743,7 +21512,7 @@
                 </a:solidFill>
                 <a:latin typeface="Pretendard"/>
               </a:rPr>
-              <a:t>HOW TO USE</a:t>
+              <a:t>COPYRIGHT · LICENSE</a:t>
             </a:r>
           </a:p>
         </p:txBody>
@@ -22782,7 +21551,7 @@
                 </a:solidFill>
                 <a:latin typeface="Pretendard"/>
               </a:rPr>
-              <a:t>이 자료 사용 방법</a:t>
+              <a:t>저작권 · 이용 조건 (CC BY-NC-ND 4.0)</a:t>
             </a:r>
           </a:p>
         </p:txBody>
@@ -22821,7 +21590,7 @@
                 </a:solidFill>
                 <a:latin typeface="Pretendard"/>
               </a:rPr>
-              <a:t>1.  수업·강의·자습에 그대로 쓰셔도 됩니다. 출처만 남겨 주세요.</a:t>
+              <a:t>1.  저작권 © 2026 이애본(드림아이티비즈 DreamIT Biz). 발행 홍문원(洪文院, 출판사 신고번호 제2026-000026호). 2026년 1월 「생성형 AI와 창의력·복합문제능력 향상 과정」 강의안을 전자출판용으로 다시 묶은 것입니다. ISBN: 등록 후 기재.</a:t>
             </a:r>
           </a:p>
           <a:p>
@@ -22840,7 +21609,7 @@
                 </a:solidFill>
                 <a:latin typeface="Pretendard"/>
               </a:rPr>
-              <a:t>2.  PDF 는 화면으로 읽는 용도, PPTX 는 발표용입니다. PPTX 는 Pretendard 글꼴이 설치된 컴퓨터에서 가장 똑같이 보입니다.</a:t>
+              <a:t>2.  이 자료는 크리에이티브 커먼즈 저작자표시-비영리-변경금지 4.0 국제(CC BY-NC-ND 4.0) 라이선스를 따릅니다. creativecommons.org/licenses/by-nc-nd/4.0/deed.ko</a:t>
             </a:r>
           </a:p>
           <a:p>
@@ -22859,7 +21628,7 @@
                 </a:solidFill>
                 <a:latin typeface="Pretendard"/>
               </a:rPr>
-              <a:t>3.  출처 표기 예: 이애본(드림아이티비즈), 「자료 제목」, useful-ai.dreamitbiz.com</a:t>
+              <a:t>3.  저작자 표시(BY): 출처를 밝히면 그대로 복사해 수업·강의·자습에 쓸 수 있습니다. 비영리(NC): 유료 강의·판매·광고 수익 목적에는 쓸 수 없습니다. 변경금지(ND): 내용을 고치거나 잘라 재조합해 배포할 수 없습니다.</a:t>
             </a:r>
           </a:p>
           <a:p>
@@ -22878,7 +21647,7 @@
                 </a:solidFill>
                 <a:latin typeface="Pretendard"/>
               </a:rPr>
-              <a:t>4.  자료 안의 프롬프트는 복사해 바로 쓸 수 있습니다. [대괄호]만 내 상황으로 바꾸세요.</a:t>
+              <a:t>4.  자료 안의 외부 서비스 화면 캡처와 상표는 교육 목적 인용이며 각 서비스의 소유입니다. AI 생성 이미지는 생성 도구의 이용 약관을 따릅니다.</a:t>
             </a:r>
           </a:p>
           <a:p>
@@ -22897,7 +21666,7 @@
                 </a:solidFill>
                 <a:latin typeface="Pretendard"/>
               </a:rPr>
-              <a:t>5.  모든 자료와 영상 강의는 useful-ai.dreamitbiz.com 에서 다시 받을 수 있습니다.</a:t>
+              <a:t>5.  라이선스 범위 밖의 이용(영리·변형·2차 저작)은 먼저 문의해 주세요. aebon@dreamitbiz.com · 카카오톡 ID aebon</a:t>
             </a:r>
           </a:p>
         </p:txBody>
@@ -22936,7 +21705,7 @@
                 </a:solidFill>
                 <a:latin typeface="Pretendard"/>
               </a:rPr>
-              <a:t>© 2026 이애본(드림아이티비즈) · useful-ai.dreamitbiz.com · 교육 목적 비영리 이용 · 출처 표기</a:t>
+              <a:t>© 2026 이애본 · 홍문원(洪文院) 발행 · CC BY-NC-ND 4.0 · useful-ai.dreamitbiz.com</a:t>
             </a:r>
           </a:p>
         </p:txBody>
@@ -23125,7 +21894,7 @@
                 </a:solidFill>
                 <a:latin typeface="Pretendard"/>
               </a:rPr>
-              <a:t>COPYRIGHT · LICENSE</a:t>
+              <a:t>CREDITS · CONTACT</a:t>
             </a:r>
           </a:p>
         </p:txBody>
@@ -23164,7 +21933,7 @@
                 </a:solidFill>
                 <a:latin typeface="Pretendard"/>
               </a:rPr>
-              <a:t>저작권 · 이용 조건</a:t>
+              <a:t>출처 · 문의</a:t>
             </a:r>
           </a:p>
         </p:txBody>
@@ -23203,7 +21972,7 @@
                 </a:solidFill>
                 <a:latin typeface="Pretendard"/>
               </a:rPr>
-              <a:t>1.  저작권 © 2026 이애본(드림아이티비즈 DreamIT Biz). 2026년 1월 「생성형 AI와 창의력·복합문제능력 향상 과정」 강의안을 공개용으로 다시 묶은 것입니다.</a:t>
+              <a:t>이애본 (Aebon Lee, Ph.D) — 드림아이티비즈 대표 · 한신대학교 AI·SW대학 겸임교수</a:t>
             </a:r>
           </a:p>
           <a:p>
@@ -23222,7 +21991,7 @@
                 </a:solidFill>
                 <a:latin typeface="Pretendard"/>
               </a:rPr>
-              <a:t>2.  교육 목적의 비영리 이용을 허용합니다 — 출처를 표기해 주세요.</a:t>
+              <a:t>useful-ai.dreamitbiz.com — 강의안·영상 강의 라이브러리</a:t>
             </a:r>
           </a:p>
           <a:p>
@@ -23241,7 +22010,7 @@
                 </a:solidFill>
                 <a:latin typeface="Pretendard"/>
               </a:rPr>
-              <a:t>3.  재배포·판매·변형(내용 수정 후 배포)은 허용하지 않습니다. 필요하면 먼저 문의해 주세요.</a:t>
+              <a:t>aebon@dreamitbiz.com · 카카오톡 ID aebon</a:t>
             </a:r>
           </a:p>
           <a:p>
@@ -23260,26 +22029,7 @@
                 </a:solidFill>
                 <a:latin typeface="Pretendard"/>
               </a:rPr>
-              <a:t>4.  자료 안의 외부 서비스 화면 캡처와 상표는 교육 목적 인용이며 각 서비스의 소유입니다. AI 생성 이미지는 생성 도구의 이용 약관을 따릅니다.</a:t>
-            </a:r>
-          </a:p>
-          <a:p>
-            <a:pPr algn="l">
-              <a:lnSpc>
-                <a:spcPct val="130000"/>
-              </a:lnSpc>
-              <a:spcBef>
-                <a:spcPts val="900"/>
-              </a:spcBef>
-            </a:pPr>
-            <a:r>
-              <a:rPr sz="1500" b="0">
-                <a:solidFill>
-                  <a:srgbClr val="333333"/>
-                </a:solidFill>
-                <a:latin typeface="Pretendard"/>
-              </a:rPr>
-              <a:t>5.  문의 aebon@dreamitbiz.com · 카카오톡 ID aebon</a:t>
+              <a:t>© 2026 이애본 · 발행 홍문원(洪文院) · CC BY-NC-ND 4.0</a:t>
             </a:r>
           </a:p>
         </p:txBody>
@@ -23318,370 +22068,7 @@
                 </a:solidFill>
                 <a:latin typeface="Pretendard"/>
               </a:rPr>
-              <a:t>© 2026 이애본(드림아이티비즈) · useful-ai.dreamitbiz.com · 교육 목적 비영리 이용 · 출처 표기</a:t>
-            </a:r>
-          </a:p>
-        </p:txBody>
-      </p:sp>
-    </p:spTree>
-  </p:cSld>
-  <p:clrMapOvr>
-    <a:masterClrMapping/>
-  </p:clrMapOvr>
-</p:sld>
-</file>
-
-<file path=ppt/slides/slide22.xml><?xml version="1.0" encoding="utf-8"?>
-<p:sld xmlns:a="http://schemas.openxmlformats.org/drawingml/2006/main" xmlns:p="http://schemas.openxmlformats.org/presentationml/2006/main" xmlns:r="http://schemas.openxmlformats.org/officeDocument/2006/relationships">
-  <p:cSld>
-    <p:spTree>
-      <p:nvGrpSpPr>
-        <p:cNvPr id="1" name=""/>
-        <p:cNvGrpSpPr/>
-        <p:nvPr/>
-      </p:nvGrpSpPr>
-      <p:grpSpPr/>
-      <p:sp>
-        <p:nvSpPr>
-          <p:cNvPr id="2" name="deckgen:wrap:bg"/>
-          <p:cNvSpPr/>
-          <p:nvPr/>
-        </p:nvSpPr>
-        <p:spPr>
-          <a:xfrm>
-            <a:off x="0" y="0"/>
-            <a:ext cx="12192000" cy="6858000"/>
-          </a:xfrm>
-          <a:prstGeom prst="rect">
-            <a:avLst/>
-          </a:prstGeom>
-          <a:solidFill>
-            <a:srgbClr val="FFFFFF"/>
-          </a:solidFill>
-          <a:ln>
-            <a:noFill/>
-          </a:ln>
-          <a:effectLst/>
-        </p:spPr>
-        <p:style>
-          <a:lnRef idx="1">
-            <a:schemeClr val="accent1"/>
-          </a:lnRef>
-          <a:fillRef idx="3">
-            <a:schemeClr val="accent1"/>
-          </a:fillRef>
-          <a:effectRef idx="2">
-            <a:schemeClr val="accent1"/>
-          </a:effectRef>
-          <a:fontRef idx="minor">
-            <a:schemeClr val="lt1"/>
-          </a:fontRef>
-        </p:style>
-        <p:txBody>
-          <a:bodyPr rtlCol="0" anchor="ctr"/>
-          <a:lstStyle/>
-          <a:p>
-            <a:pPr algn="ctr"/>
-          </a:p>
-        </p:txBody>
-      </p:sp>
-      <p:sp>
-        <p:nvSpPr>
-          <p:cNvPr id="3" name="deckgen:wrap:side"/>
-          <p:cNvSpPr/>
-          <p:nvPr/>
-        </p:nvSpPr>
-        <p:spPr>
-          <a:xfrm>
-            <a:off x="0" y="0"/>
-            <a:ext cx="146304" cy="6858000"/>
-          </a:xfrm>
-          <a:prstGeom prst="rect">
-            <a:avLst/>
-          </a:prstGeom>
-          <a:solidFill>
-            <a:srgbClr val="0072CE"/>
-          </a:solidFill>
-          <a:ln>
-            <a:noFill/>
-          </a:ln>
-          <a:effectLst/>
-        </p:spPr>
-        <p:style>
-          <a:lnRef idx="1">
-            <a:schemeClr val="accent1"/>
-          </a:lnRef>
-          <a:fillRef idx="3">
-            <a:schemeClr val="accent1"/>
-          </a:fillRef>
-          <a:effectRef idx="2">
-            <a:schemeClr val="accent1"/>
-          </a:effectRef>
-          <a:fontRef idx="minor">
-            <a:schemeClr val="lt1"/>
-          </a:fontRef>
-        </p:style>
-        <p:txBody>
-          <a:bodyPr rtlCol="0" anchor="ctr"/>
-          <a:lstStyle/>
-          <a:p>
-            <a:pPr algn="ctr"/>
-          </a:p>
-        </p:txBody>
-      </p:sp>
-      <p:sp>
-        <p:nvSpPr>
-          <p:cNvPr id="4" name="deckgen:wrap:rule"/>
-          <p:cNvSpPr/>
-          <p:nvPr/>
-        </p:nvSpPr>
-        <p:spPr>
-          <a:xfrm>
-            <a:off x="853440" y="2057400"/>
-            <a:ext cx="975360" cy="38100"/>
-          </a:xfrm>
-          <a:prstGeom prst="rect">
-            <a:avLst/>
-          </a:prstGeom>
-          <a:solidFill>
-            <a:srgbClr val="0072CE"/>
-          </a:solidFill>
-          <a:ln>
-            <a:noFill/>
-          </a:ln>
-          <a:effectLst/>
-        </p:spPr>
-        <p:style>
-          <a:lnRef idx="1">
-            <a:schemeClr val="accent1"/>
-          </a:lnRef>
-          <a:fillRef idx="3">
-            <a:schemeClr val="accent1"/>
-          </a:fillRef>
-          <a:effectRef idx="2">
-            <a:schemeClr val="accent1"/>
-          </a:effectRef>
-          <a:fontRef idx="minor">
-            <a:schemeClr val="lt1"/>
-          </a:fontRef>
-        </p:style>
-        <p:txBody>
-          <a:bodyPr rtlCol="0" anchor="ctr"/>
-          <a:lstStyle/>
-          <a:p>
-            <a:pPr algn="ctr"/>
-          </a:p>
-        </p:txBody>
-      </p:sp>
-      <p:sp>
-        <p:nvSpPr>
-          <p:cNvPr id="5" name="deckgen:wrap:eyebrow"/>
-          <p:cNvSpPr txBox="1"/>
-          <p:nvPr/>
-        </p:nvSpPr>
-        <p:spPr>
-          <a:xfrm>
-            <a:off x="853440" y="1165860"/>
-            <a:ext cx="10485120" cy="342900"/>
-          </a:xfrm>
-          <a:prstGeom prst="rect">
-            <a:avLst/>
-          </a:prstGeom>
-          <a:noFill/>
-        </p:spPr>
-        <p:txBody>
-          <a:bodyPr wrap="square" anchor="t" lIns="0" rIns="0" tIns="0" bIns="0">
-            <a:spAutoFit/>
-          </a:bodyPr>
-          <a:lstStyle/>
-          <a:p>
-            <a:pPr algn="l">
-              <a:lnSpc>
-                <a:spcPct val="125000"/>
-              </a:lnSpc>
-            </a:pPr>
-            <a:r>
-              <a:rPr sz="1200" b="1">
-                <a:solidFill>
-                  <a:srgbClr val="0072CE"/>
-                </a:solidFill>
-                <a:latin typeface="Pretendard"/>
-              </a:rPr>
-              <a:t>CREDITS · CONTACT</a:t>
-            </a:r>
-          </a:p>
-        </p:txBody>
-      </p:sp>
-      <p:sp>
-        <p:nvSpPr>
-          <p:cNvPr id="6" name="deckgen:wrap:title"/>
-          <p:cNvSpPr txBox="1"/>
-          <p:nvPr/>
-        </p:nvSpPr>
-        <p:spPr>
-          <a:xfrm>
-            <a:off x="853440" y="1440180"/>
-            <a:ext cx="10485120" cy="617220"/>
-          </a:xfrm>
-          <a:prstGeom prst="rect">
-            <a:avLst/>
-          </a:prstGeom>
-          <a:noFill/>
-        </p:spPr>
-        <p:txBody>
-          <a:bodyPr wrap="square" anchor="t" lIns="0" rIns="0" tIns="0" bIns="0">
-            <a:spAutoFit/>
-          </a:bodyPr>
-          <a:lstStyle/>
-          <a:p>
-            <a:pPr algn="l">
-              <a:lnSpc>
-                <a:spcPct val="125000"/>
-              </a:lnSpc>
-            </a:pPr>
-            <a:r>
-              <a:rPr sz="3000" b="1">
-                <a:solidFill>
-                  <a:srgbClr val="1A2A5E"/>
-                </a:solidFill>
-                <a:latin typeface="Pretendard"/>
-              </a:rPr>
-              <a:t>출처 · 문의</a:t>
-            </a:r>
-          </a:p>
-        </p:txBody>
-      </p:sp>
-      <p:sp>
-        <p:nvSpPr>
-          <p:cNvPr id="7" name="deckgen:wrap:body"/>
-          <p:cNvSpPr txBox="1"/>
-          <p:nvPr/>
-        </p:nvSpPr>
-        <p:spPr>
-          <a:xfrm>
-            <a:off x="853440" y="2400300"/>
-            <a:ext cx="10485120" cy="3566160"/>
-          </a:xfrm>
-          <a:prstGeom prst="rect">
-            <a:avLst/>
-          </a:prstGeom>
-          <a:noFill/>
-        </p:spPr>
-        <p:txBody>
-          <a:bodyPr wrap="square" anchor="t" lIns="0" rIns="0" tIns="0" bIns="0">
-            <a:spAutoFit/>
-          </a:bodyPr>
-          <a:lstStyle/>
-          <a:p>
-            <a:pPr algn="l">
-              <a:lnSpc>
-                <a:spcPct val="130000"/>
-              </a:lnSpc>
-            </a:pPr>
-            <a:r>
-              <a:rPr sz="1500" b="0">
-                <a:solidFill>
-                  <a:srgbClr val="333333"/>
-                </a:solidFill>
-                <a:latin typeface="Pretendard"/>
-              </a:rPr>
-              <a:t>이애본 (Aebon Lee, Ph.D) — 드림아이티비즈 대표 · 한신대학교 AI·SW대학 겸임교수</a:t>
-            </a:r>
-          </a:p>
-          <a:p>
-            <a:pPr algn="l">
-              <a:lnSpc>
-                <a:spcPct val="130000"/>
-              </a:lnSpc>
-              <a:spcBef>
-                <a:spcPts val="900"/>
-              </a:spcBef>
-            </a:pPr>
-            <a:r>
-              <a:rPr sz="1500" b="0">
-                <a:solidFill>
-                  <a:srgbClr val="333333"/>
-                </a:solidFill>
-                <a:latin typeface="Pretendard"/>
-              </a:rPr>
-              <a:t>useful-ai.dreamitbiz.com — 강의안·영상 강의 라이브러리</a:t>
-            </a:r>
-          </a:p>
-          <a:p>
-            <a:pPr algn="l">
-              <a:lnSpc>
-                <a:spcPct val="130000"/>
-              </a:lnSpc>
-              <a:spcBef>
-                <a:spcPts val="900"/>
-              </a:spcBef>
-            </a:pPr>
-            <a:r>
-              <a:rPr sz="1500" b="0">
-                <a:solidFill>
-                  <a:srgbClr val="333333"/>
-                </a:solidFill>
-                <a:latin typeface="Pretendard"/>
-              </a:rPr>
-              <a:t>aebon@dreamitbiz.com · 카카오톡 ID aebon</a:t>
-            </a:r>
-          </a:p>
-          <a:p>
-            <a:pPr algn="l">
-              <a:lnSpc>
-                <a:spcPct val="130000"/>
-              </a:lnSpc>
-              <a:spcBef>
-                <a:spcPts val="900"/>
-              </a:spcBef>
-            </a:pPr>
-            <a:r>
-              <a:rPr sz="1500" b="0">
-                <a:solidFill>
-                  <a:srgbClr val="333333"/>
-                </a:solidFill>
-                <a:latin typeface="Pretendard"/>
-              </a:rPr>
-              <a:t>© 2026 이애본(드림아이티비즈). 교육 목적 비영리 이용 · 출처 표기</a:t>
-            </a:r>
-          </a:p>
-        </p:txBody>
-      </p:sp>
-      <p:sp>
-        <p:nvSpPr>
-          <p:cNvPr id="8" name="deckgen:wrap:footer"/>
-          <p:cNvSpPr txBox="1"/>
-          <p:nvPr/>
-        </p:nvSpPr>
-        <p:spPr>
-          <a:xfrm>
-            <a:off x="853440" y="6240780"/>
-            <a:ext cx="10485120" cy="342900"/>
-          </a:xfrm>
-          <a:prstGeom prst="rect">
-            <a:avLst/>
-          </a:prstGeom>
-          <a:noFill/>
-        </p:spPr>
-        <p:txBody>
-          <a:bodyPr wrap="square" anchor="t" lIns="0" rIns="0" tIns="0" bIns="0">
-            <a:spAutoFit/>
-          </a:bodyPr>
-          <a:lstStyle/>
-          <a:p>
-            <a:pPr algn="r">
-              <a:lnSpc>
-                <a:spcPct val="125000"/>
-              </a:lnSpc>
-            </a:pPr>
-            <a:r>
-              <a:rPr sz="900" b="0">
-                <a:solidFill>
-                  <a:srgbClr val="888888"/>
-                </a:solidFill>
-                <a:latin typeface="Pretendard"/>
-              </a:rPr>
-              <a:t>© 2026 이애본(드림아이티비즈) · useful-ai.dreamitbiz.com · 교육 목적 비영리 이용 · 출처 표기</a:t>
+              <a:t>© 2026 이애본 · 홍문원(洪文院) 발행 · CC BY-NC-ND 4.0 · useful-ai.dreamitbiz.com</a:t>
             </a:r>
           </a:p>
         </p:txBody>
@@ -24717,7 +23104,7 @@
                 </a:solidFill>
                 <a:latin typeface="Pretendard"/>
               </a:rPr>
-              <a:t>© 2026 이애본(드림아이티비즈) · useful-ai.dreamitbiz.com · 교육 목적 비영리 이용 · 출처 표기</a:t>
+              <a:t>© 2026 이애본 · 홍문원(洪文院) 발행 · CC BY-NC-ND 4.0 · useful-ai.dreamitbiz.com</a:t>
             </a:r>
           </a:p>
         </p:txBody>
@@ -26157,7 +24544,7 @@
                 </a:solidFill>
                 <a:latin typeface="Pretendard"/>
               </a:rPr>
-              <a:t>© 2026 이애본(드림아이티비즈) · useful-ai.dreamitbiz.com · 교육 목적 비영리 이용 · 출처 표기</a:t>
+              <a:t>© 2026 이애본 · 홍문원(洪文院) 발행 · CC BY-NC-ND 4.0 · useful-ai.dreamitbiz.com</a:t>
             </a:r>
           </a:p>
         </p:txBody>
@@ -27174,7 +25561,7 @@
                 <a:ea typeface="Noto Sans KR" pitchFamily="34" charset="-122"/>
                 <a:cs typeface="Noto Sans KR" pitchFamily="34" charset="-120"/>
               </a:rPr>
-              <a:t>문장 끝에 공백을 2칸 넣거나, 단순히 빈 줄을 활용하는 것이 좋습니다.</a:t>
+              <a:t>문장 끝에 공백을 2칸 넣거나 &lt;br&gt; 태그를 사용합니다.</a:t>
             </a:r>
             <a:endParaRPr lang="en-US" sz="1200" dirty="0"/>
           </a:p>
@@ -28088,7 +26475,7 @@
                 </a:solidFill>
                 <a:latin typeface="Pretendard"/>
               </a:rPr>
-              <a:t>© 2026 이애본(드림아이티비즈) · useful-ai.dreamitbiz.com · 교육 목적 비영리 이용 · 출처 표기</a:t>
+              <a:t>© 2026 이애본 · 홍문원(洪文院) 발행 · CC BY-NC-ND 4.0 · useful-ai.dreamitbiz.com</a:t>
             </a:r>
           </a:p>
         </p:txBody>
@@ -30508,7 +28895,7 @@
                 <a:ea typeface="Noto Sans KR" pitchFamily="34" charset="-122"/>
                 <a:cs typeface="Noto Sans KR" pitchFamily="34" charset="-120"/>
               </a:rPr>
-              <a:t>중요한 단어는</a:t>
+              <a:t>중요한 단어는 굵게(Bold) </a:t>
             </a:r>
             <a:r>
               <a:rPr lang="en-US" sz="1100" b="1" kern="0" spc="-11" dirty="0">
@@ -30519,7 +28906,7 @@
                 <a:ea typeface="Noto Sans KR" pitchFamily="34" charset="-122"/>
                 <a:cs typeface="Noto Sans KR" pitchFamily="34" charset="-120"/>
               </a:rPr>
-              <a:t>굵게(Bold)</a:t>
+              <a:t/>
             </a:r>
             <a:r>
               <a:rPr lang="en-US" sz="1100" kern="0" spc="-11" dirty="0">
@@ -30530,7 +28917,7 @@
                 <a:ea typeface="Noto Sans KR" pitchFamily="34" charset="-122"/>
                 <a:cs typeface="Noto Sans KR" pitchFamily="34" charset="-120"/>
               </a:rPr>
-              <a:t>표시하고, 강조하고 싶으면</a:t>
+              <a:t>표시하고, 강조하고 싶으면 기울여(Italic) </a:t>
             </a:r>
             <a:r>
               <a:rPr lang="en-US" sz="1100" i="1" kern="0" spc="-11" dirty="0">
@@ -30541,7 +28928,7 @@
                 <a:ea typeface="Noto Sans KR" pitchFamily="34" charset="-122"/>
                 <a:cs typeface="Noto Sans KR" pitchFamily="34" charset="-120"/>
               </a:rPr>
-              <a:t>기울여(Italic)</a:t>
+              <a:t/>
             </a:r>
             <a:r>
               <a:rPr lang="en-US" sz="1100" kern="0" spc="-11" dirty="0">
@@ -30591,7 +28978,7 @@
                 <a:ea typeface="Noto Sans KR" pitchFamily="34" charset="-122"/>
                 <a:cs typeface="Noto Sans KR" pitchFamily="34" charset="-120"/>
               </a:rPr>
-              <a:t>단축키는</a:t>
+              <a:t>단축키는 </a:t>
             </a:r>
             <a:r>
               <a:rPr lang="en-US" sz="1000" b="1" kern="0" spc="-11" dirty="0">
@@ -30715,7 +29102,7 @@
                 </a:solidFill>
                 <a:latin typeface="Pretendard"/>
               </a:rPr>
-              <a:t>© 2026 이애본(드림아이티비즈) · useful-ai.dreamitbiz.com · 교육 목적 비영리 이용 · 출처 표기</a:t>
+              <a:t>© 2026 이애본 · 홍문원(洪文院) 발행 · CC BY-NC-ND 4.0 · useful-ai.dreamitbiz.com</a:t>
             </a:r>
           </a:p>
         </p:txBody>
@@ -32351,7 +30738,7 @@
         </p:nvSpPr>
         <p:spPr>
           <a:xfrm>
-            <a:off x="5312664" y="2379269"/>
+            <a:off x="5465064" y="2379269"/>
             <a:ext cx="162763" cy="152705"/>
           </a:xfrm>
           <a:prstGeom prst="rect">
@@ -32390,7 +30777,7 @@
         </p:nvSpPr>
         <p:spPr>
           <a:xfrm>
-            <a:off x="5393131" y="2379269"/>
+            <a:off x="5545531" y="2379269"/>
             <a:ext cx="342900" cy="152705"/>
           </a:xfrm>
           <a:prstGeom prst="rect">
@@ -32429,7 +30816,7 @@
         </p:nvSpPr>
         <p:spPr>
           <a:xfrm>
-            <a:off x="5312664" y="2593238"/>
+            <a:off x="5465064" y="2593238"/>
             <a:ext cx="162763" cy="152705"/>
           </a:xfrm>
           <a:prstGeom prst="rect">
@@ -32468,7 +30855,7 @@
         </p:nvSpPr>
         <p:spPr>
           <a:xfrm>
-            <a:off x="5393131" y="2593238"/>
+            <a:off x="5545531" y="2593238"/>
             <a:ext cx="476402" cy="152705"/>
           </a:xfrm>
           <a:prstGeom prst="rect">
@@ -32702,7 +31089,7 @@
         </p:nvSpPr>
         <p:spPr>
           <a:xfrm>
-            <a:off x="5312664" y="3637483"/>
+            <a:off x="5541264" y="3637483"/>
             <a:ext cx="238658" cy="152705"/>
           </a:xfrm>
           <a:prstGeom prst="rect">
@@ -32741,7 +31128,7 @@
         </p:nvSpPr>
         <p:spPr>
           <a:xfrm>
-            <a:off x="5473598" y="3637483"/>
+            <a:off x="5702198" y="3637483"/>
             <a:ext cx="342900" cy="152705"/>
           </a:xfrm>
           <a:prstGeom prst="rect">
@@ -33150,7 +31537,7 @@
                 <a:ea typeface="Noto Sans KR" pitchFamily="34" charset="-122"/>
                 <a:cs typeface="Noto Sans KR" pitchFamily="34" charset="-120"/>
               </a:rPr>
-              <a:t>2.    </a:t>
+              <a:t>2. </a:t>
             </a:r>
             <a:r>
               <a:rPr lang="en-US" sz="1000" dirty="0" err="1">
@@ -33343,7 +31730,7 @@
                 </a:solidFill>
                 <a:latin typeface="Pretendard"/>
               </a:rPr>
-              <a:t>© 2026 이애본(드림아이티비즈) · useful-ai.dreamitbiz.com · 교육 목적 비영리 이용 · 출처 표기</a:t>
+              <a:t>© 2026 이애본 · 홍문원(洪文院) 발행 · CC BY-NC-ND 4.0 · useful-ai.dreamitbiz.com</a:t>
             </a:r>
           </a:p>
         </p:txBody>
@@ -35744,7 +34131,7 @@
                 </a:solidFill>
                 <a:latin typeface="Pretendard"/>
               </a:rPr>
-              <a:t>© 2026 이애본(드림아이티비즈) · useful-ai.dreamitbiz.com · 교육 목적 비영리 이용 · 출처 표기</a:t>
+              <a:t>© 2026 이애본 · 홍문원(洪文院) 발행 · CC BY-NC-ND 4.0 · useful-ai.dreamitbiz.com</a:t>
             </a:r>
           </a:p>
         </p:txBody>
@@ -39449,7 +37836,7 @@
                 </a:solidFill>
                 <a:latin typeface="Pretendard"/>
               </a:rPr>
-              <a:t>© 2026 이애본(드림아이티비즈) · useful-ai.dreamitbiz.com · 교육 목적 비영리 이용 · 출처 표기</a:t>
+              <a:t>© 2026 이애본 · 홍문원(洪文院) 발행 · CC BY-NC-ND 4.0 · useful-ai.dreamitbiz.com</a:t>
             </a:r>
           </a:p>
         </p:txBody>

--- a/library/b04-markdown/b04-markdown.pptx
+++ b/library/b04-markdown/b04-markdown.pptx
@@ -4877,7 +4877,7 @@
         </p:nvSpPr>
         <p:spPr>
           <a:xfrm>
-            <a:off x="571500" y="-790956"/>
+            <a:off x="571500" y="-409956"/>
             <a:ext cx="7579462" cy="2648102"/>
           </a:xfrm>
           <a:prstGeom prst="rect">
@@ -22174,7 +22174,7 @@
         </p:nvSpPr>
         <p:spPr>
           <a:xfrm>
-            <a:off x="571500" y="-790956"/>
+            <a:off x="571500" y="-409956"/>
             <a:ext cx="7579462" cy="2648102"/>
           </a:xfrm>
           <a:prstGeom prst="rect">
@@ -25047,7 +25047,7 @@
         <p:spPr>
           <a:xfrm>
             <a:off x="1037844" y="2714854"/>
-            <a:ext cx="424282" cy="228600"/>
+            <a:ext cx="381000" cy="228600"/>
           </a:xfrm>
           <a:prstGeom prst="rect">
             <a:avLst/>
@@ -25085,8 +25085,8 @@
         </p:nvSpPr>
         <p:spPr>
           <a:xfrm>
-            <a:off x="1367942" y="2714854"/>
-            <a:ext cx="1076249" cy="228600"/>
+            <a:off x="1405890" y="2714854"/>
+            <a:ext cx="914400" cy="228600"/>
           </a:xfrm>
           <a:prstGeom prst="rect">
             <a:avLst/>
@@ -25124,8 +25124,8 @@
         </p:nvSpPr>
         <p:spPr>
           <a:xfrm>
-            <a:off x="2239366" y="2714854"/>
-            <a:ext cx="1173175" cy="228600"/>
+            <a:off x="2297430" y="2714854"/>
+            <a:ext cx="1016000" cy="228600"/>
           </a:xfrm>
           <a:prstGeom prst="rect">
             <a:avLst/>
@@ -25163,8 +25163,8 @@
         </p:nvSpPr>
         <p:spPr>
           <a:xfrm>
-            <a:off x="1037844" y="2714854"/>
-            <a:ext cx="3648456" cy="457200"/>
+            <a:off x="1037844" y="2943454"/>
+            <a:ext cx="3648456" cy="228600"/>
           </a:xfrm>
           <a:prstGeom prst="rect">
             <a:avLst/>
@@ -25306,7 +25306,7 @@
         <p:spPr>
           <a:xfrm>
             <a:off x="1037844" y="4714646"/>
-            <a:ext cx="846734" cy="228600"/>
+            <a:ext cx="685800" cy="228600"/>
           </a:xfrm>
           <a:prstGeom prst="rect">
             <a:avLst/>
@@ -25344,8 +25344,8 @@
         </p:nvSpPr>
         <p:spPr>
           <a:xfrm>
-            <a:off x="1691640" y="4714646"/>
-            <a:ext cx="1388059" cy="228600"/>
+            <a:off x="1720850" y="4714646"/>
+            <a:ext cx="1143000" cy="228600"/>
           </a:xfrm>
           <a:prstGeom prst="rect">
             <a:avLst/>
@@ -25383,7 +25383,7 @@
         </p:nvSpPr>
         <p:spPr>
           <a:xfrm>
-            <a:off x="2800807" y="4743907"/>
+            <a:off x="2842260" y="4743907"/>
             <a:ext cx="362102" cy="190195"/>
           </a:xfrm>
           <a:prstGeom prst="roundRect">
@@ -25419,7 +25419,7 @@
         </p:nvSpPr>
         <p:spPr>
           <a:xfrm>
-            <a:off x="2839212" y="4743907"/>
+            <a:off x="2881630" y="4743907"/>
             <a:ext cx="362102" cy="191110"/>
           </a:xfrm>
           <a:prstGeom prst="rect">
@@ -25458,8 +25458,8 @@
         </p:nvSpPr>
         <p:spPr>
           <a:xfrm>
-            <a:off x="1037844" y="4714646"/>
-            <a:ext cx="3706063" cy="457200"/>
+            <a:off x="1037844" y="4943246"/>
+            <a:ext cx="3706063" cy="228600"/>
           </a:xfrm>
           <a:prstGeom prst="rect">
             <a:avLst/>
@@ -25536,8 +25536,8 @@
         </p:nvSpPr>
         <p:spPr>
           <a:xfrm>
-            <a:off x="1037844" y="5400446"/>
-            <a:ext cx="5330038" cy="457200"/>
+            <a:off x="1037844" y="5629046"/>
+            <a:ext cx="5330038" cy="228600"/>
           </a:xfrm>
           <a:prstGeom prst="rect">
             <a:avLst/>
@@ -34789,8 +34789,8 @@
         </p:nvSpPr>
         <p:spPr>
           <a:xfrm>
-            <a:off x="1037844" y="2486254"/>
-            <a:ext cx="3591763" cy="457200"/>
+            <a:off x="1037844" y="2714854"/>
+            <a:ext cx="3591763" cy="228600"/>
           </a:xfrm>
           <a:prstGeom prst="rect">
             <a:avLst/>

--- a/library/b04-markdown/b04-markdown.pptx
+++ b/library/b04-markdown/b04-markdown.pptx
@@ -2473,9 +2473,9 @@
                     <a:alpha val="30000"/>
                   </a:srgbClr>
                 </a:solidFill>
-                <a:latin typeface="Consolas" pitchFamily="34" charset="0"/>
-                <a:ea typeface="Consolas" pitchFamily="34" charset="-122"/>
-                <a:cs typeface="Consolas" pitchFamily="34" charset="-120"/>
+                <a:latin typeface="JetBrains Mono" pitchFamily="34" charset="0"/>
+                <a:ea typeface="JetBrains Mono" pitchFamily="34" charset="-122"/>
+                <a:cs typeface="JetBrains Mono" pitchFamily="34" charset="-120"/>
               </a:rPr>
               <a:t># Markdown</a:t>
             </a:r>
@@ -2514,9 +2514,9 @@
                     <a:alpha val="30000"/>
                   </a:srgbClr>
                 </a:solidFill>
-                <a:latin typeface="Consolas" pitchFamily="34" charset="0"/>
-                <a:ea typeface="Consolas" pitchFamily="34" charset="-122"/>
-                <a:cs typeface="Consolas" pitchFamily="34" charset="-120"/>
+                <a:latin typeface="JetBrains Mono" pitchFamily="34" charset="0"/>
+                <a:ea typeface="JetBrains Mono" pitchFamily="34" charset="-122"/>
+                <a:cs typeface="JetBrains Mono" pitchFamily="34" charset="-120"/>
               </a:rPr>
               <a:t>**Bold**</a:t>
             </a:r>
@@ -2555,9 +2555,9 @@
                     <a:alpha val="30000"/>
                   </a:srgbClr>
                 </a:solidFill>
-                <a:latin typeface="Consolas" pitchFamily="34" charset="0"/>
-                <a:ea typeface="Consolas" pitchFamily="34" charset="-122"/>
-                <a:cs typeface="Consolas" pitchFamily="34" charset="-120"/>
+                <a:latin typeface="JetBrains Mono" pitchFamily="34" charset="0"/>
+                <a:ea typeface="JetBrains Mono" pitchFamily="34" charset="-122"/>
+                <a:cs typeface="JetBrains Mono" pitchFamily="34" charset="-120"/>
               </a:rPr>
               <a:t>[Link](url)</a:t>
             </a:r>
@@ -2596,9 +2596,9 @@
                     <a:alpha val="30000"/>
                   </a:srgbClr>
                 </a:solidFill>
-                <a:latin typeface="Consolas" pitchFamily="34" charset="0"/>
-                <a:ea typeface="Consolas" pitchFamily="34" charset="-122"/>
-                <a:cs typeface="Consolas" pitchFamily="34" charset="-120"/>
+                <a:latin typeface="JetBrains Mono" pitchFamily="34" charset="0"/>
+                <a:ea typeface="JetBrains Mono" pitchFamily="34" charset="-122"/>
+                <a:cs typeface="JetBrains Mono" pitchFamily="34" charset="-120"/>
               </a:rPr>
               <a:t>`code`</a:t>
             </a:r>
@@ -2637,9 +2637,9 @@
                     <a:alpha val="10000"/>
                   </a:srgbClr>
                 </a:solidFill>
-                <a:latin typeface="Consolas" pitchFamily="34" charset="0"/>
-                <a:ea typeface="Consolas" pitchFamily="34" charset="-122"/>
-                <a:cs typeface="Consolas" pitchFamily="34" charset="-120"/>
+                <a:latin typeface="JetBrains Mono" pitchFamily="34" charset="0"/>
+                <a:ea typeface="JetBrains Mono" pitchFamily="34" charset="-122"/>
+                <a:cs typeface="JetBrains Mono" pitchFamily="34" charset="-120"/>
               </a:rPr>
               <a:t>&gt; Blockquote</a:t>
             </a:r>
@@ -21590,7 +21590,7 @@
                 </a:solidFill>
                 <a:latin typeface="Pretendard"/>
               </a:rPr>
-              <a:t>1.  저작권 © 2026 이애본(드림아이티비즈 DreamIT Biz). 발행 홍문원(洪文院, 출판사 신고번호 제2026-000026호). 2026년 1월 「생성형 AI와 창의력·복합문제능력 향상 과정」 강의안을 전자출판용으로 다시 묶은 것입니다. ISBN: 등록 후 기재.</a:t>
+              <a:t>1.  저작권 © 2026 이애본(드림아이티비즈 DreamIT Biz). 발행 홍문원(洪文院, 출판사 신고번호 제2026-000026호). 이애본이 2026년 대학·기관 강의 현장에서 쓴 강의안을 전자출판용으로 다시 묶은 것입니다. ISBN: 등록 후 기재.</a:t>
             </a:r>
           </a:p>
           <a:p>
@@ -32272,9 +32272,9 @@
                 <a:solidFill>
                   <a:srgbClr val="94A3B8"/>
                 </a:solidFill>
-                <a:latin typeface="Nanum Gothic Coding" pitchFamily="34" charset="0"/>
-                <a:ea typeface="Nanum Gothic Coding" pitchFamily="34" charset="-122"/>
-                <a:cs typeface="Nanum Gothic Coding" pitchFamily="34" charset="-120"/>
+                <a:latin typeface="나눔고딕코딩" pitchFamily="34" charset="0"/>
+                <a:ea typeface="나눔고딕코딩" pitchFamily="34" charset="-122"/>
+                <a:cs typeface="나눔고딕코딩" pitchFamily="34" charset="-120"/>
               </a:rPr>
               <a:t>1</a:t>
             </a:r>
@@ -32311,9 +32311,9 @@
                 <a:solidFill>
                   <a:srgbClr val="38BDF8"/>
                 </a:solidFill>
-                <a:latin typeface="Nanum Gothic Coding" pitchFamily="34" charset="0"/>
-                <a:ea typeface="Nanum Gothic Coding" pitchFamily="34" charset="-122"/>
-                <a:cs typeface="Nanum Gothic Coding" pitchFamily="34" charset="-120"/>
+                <a:latin typeface="나눔고딕코딩" pitchFamily="34" charset="0"/>
+                <a:ea typeface="나눔고딕코딩" pitchFamily="34" charset="-122"/>
+                <a:cs typeface="나눔고딕코딩" pitchFamily="34" charset="-120"/>
               </a:rPr>
               <a:t>## 1. 링크 (Hyperlinks)</a:t>
             </a:r>
@@ -32350,9 +32350,9 @@
                 <a:solidFill>
                   <a:srgbClr val="94A3B8"/>
                 </a:solidFill>
-                <a:latin typeface="Nanum Gothic Coding" pitchFamily="34" charset="0"/>
-                <a:ea typeface="Nanum Gothic Coding" pitchFamily="34" charset="-122"/>
-                <a:cs typeface="Nanum Gothic Coding" pitchFamily="34" charset="-120"/>
+                <a:latin typeface="나눔고딕코딩" pitchFamily="34" charset="0"/>
+                <a:ea typeface="나눔고딕코딩" pitchFamily="34" charset="-122"/>
+                <a:cs typeface="나눔고딕코딩" pitchFamily="34" charset="-120"/>
               </a:rPr>
               <a:t>2</a:t>
             </a:r>
@@ -32389,9 +32389,9 @@
                 <a:solidFill>
                   <a:srgbClr val="CBD5E1"/>
                 </a:solidFill>
-                <a:latin typeface="Nanum Gothic Coding" pitchFamily="34" charset="0"/>
-                <a:ea typeface="Nanum Gothic Coding" pitchFamily="34" charset="-122"/>
-                <a:cs typeface="Nanum Gothic Coding" pitchFamily="34" charset="-120"/>
+                <a:latin typeface="나눔고딕코딩" pitchFamily="34" charset="0"/>
+                <a:ea typeface="나눔고딕코딩" pitchFamily="34" charset="-122"/>
+                <a:cs typeface="나눔고딕코딩" pitchFamily="34" charset="-120"/>
               </a:rPr>
               <a:t>&lt;!-- [텍스트](주소) 형식 --&gt;</a:t>
             </a:r>
@@ -32428,9 +32428,9 @@
                 <a:solidFill>
                   <a:srgbClr val="94A3B8"/>
                 </a:solidFill>
-                <a:latin typeface="Nanum Gothic Coding" pitchFamily="34" charset="0"/>
-                <a:ea typeface="Nanum Gothic Coding" pitchFamily="34" charset="-122"/>
-                <a:cs typeface="Nanum Gothic Coding" pitchFamily="34" charset="-120"/>
+                <a:latin typeface="나눔고딕코딩" pitchFamily="34" charset="0"/>
+                <a:ea typeface="나눔고딕코딩" pitchFamily="34" charset="-122"/>
+                <a:cs typeface="나눔고딕코딩" pitchFamily="34" charset="-120"/>
               </a:rPr>
               <a:t>3</a:t>
             </a:r>
@@ -32467,9 +32467,9 @@
                 <a:solidFill>
                   <a:srgbClr val="E2E8F0"/>
                 </a:solidFill>
-                <a:latin typeface="Nanum Gothic Coding" pitchFamily="34" charset="0"/>
-                <a:ea typeface="Nanum Gothic Coding" pitchFamily="34" charset="-122"/>
-                <a:cs typeface="Nanum Gothic Coding" pitchFamily="34" charset="-120"/>
+                <a:latin typeface="나눔고딕코딩" pitchFamily="34" charset="0"/>
+                <a:ea typeface="나눔고딕코딩" pitchFamily="34" charset="-122"/>
+                <a:cs typeface="나눔고딕코딩" pitchFamily="34" charset="-120"/>
               </a:rPr>
               <a:t>공식 문서는</a:t>
             </a:r>
@@ -32506,9 +32506,9 @@
                 <a:solidFill>
                   <a:srgbClr val="F472B6"/>
                 </a:solidFill>
-                <a:latin typeface="Nanum Gothic Coding" pitchFamily="34" charset="0"/>
-                <a:ea typeface="Nanum Gothic Coding" pitchFamily="34" charset="-122"/>
-                <a:cs typeface="Nanum Gothic Coding" pitchFamily="34" charset="-120"/>
+                <a:latin typeface="나눔고딕코딩" pitchFamily="34" charset="0"/>
+                <a:ea typeface="나눔고딕코딩" pitchFamily="34" charset="-122"/>
+                <a:cs typeface="나눔고딕코딩" pitchFamily="34" charset="-120"/>
               </a:rPr>
               <a:t>[여기](https://markdownguide.org)</a:t>
             </a:r>
@@ -32545,9 +32545,9 @@
                 <a:solidFill>
                   <a:srgbClr val="E2E8F0"/>
                 </a:solidFill>
-                <a:latin typeface="Nanum Gothic Coding" pitchFamily="34" charset="0"/>
-                <a:ea typeface="Nanum Gothic Coding" pitchFamily="34" charset="-122"/>
-                <a:cs typeface="Nanum Gothic Coding" pitchFamily="34" charset="-120"/>
+                <a:latin typeface="나눔고딕코딩" pitchFamily="34" charset="0"/>
+                <a:ea typeface="나눔고딕코딩" pitchFamily="34" charset="-122"/>
+                <a:cs typeface="나눔고딕코딩" pitchFamily="34" charset="-120"/>
               </a:rPr>
               <a:t>를 참고하세요.</a:t>
             </a:r>
@@ -32584,9 +32584,9 @@
                 <a:solidFill>
                   <a:srgbClr val="94A3B8"/>
                 </a:solidFill>
-                <a:latin typeface="Nanum Gothic Coding" pitchFamily="34" charset="0"/>
-                <a:ea typeface="Nanum Gothic Coding" pitchFamily="34" charset="-122"/>
-                <a:cs typeface="Nanum Gothic Coding" pitchFamily="34" charset="-120"/>
+                <a:latin typeface="나눔고딕코딩" pitchFamily="34" charset="0"/>
+                <a:ea typeface="나눔고딕코딩" pitchFamily="34" charset="-122"/>
+                <a:cs typeface="나눔고딕코딩" pitchFamily="34" charset="-120"/>
               </a:rPr>
               <a:t>4</a:t>
             </a:r>
@@ -32623,9 +32623,9 @@
                 <a:solidFill>
                   <a:srgbClr val="94A3B8"/>
                 </a:solidFill>
-                <a:latin typeface="Nanum Gothic Coding" pitchFamily="34" charset="0"/>
-                <a:ea typeface="Nanum Gothic Coding" pitchFamily="34" charset="-122"/>
-                <a:cs typeface="Nanum Gothic Coding" pitchFamily="34" charset="-120"/>
+                <a:latin typeface="나눔고딕코딩" pitchFamily="34" charset="0"/>
+                <a:ea typeface="나눔고딕코딩" pitchFamily="34" charset="-122"/>
+                <a:cs typeface="나눔고딕코딩" pitchFamily="34" charset="-120"/>
               </a:rPr>
               <a:t>5</a:t>
             </a:r>
@@ -32662,9 +32662,9 @@
                 <a:solidFill>
                   <a:srgbClr val="38BDF8"/>
                 </a:solidFill>
-                <a:latin typeface="Nanum Gothic Coding" pitchFamily="34" charset="0"/>
-                <a:ea typeface="Nanum Gothic Coding" pitchFamily="34" charset="-122"/>
-                <a:cs typeface="Nanum Gothic Coding" pitchFamily="34" charset="-120"/>
+                <a:latin typeface="나눔고딕코딩" pitchFamily="34" charset="0"/>
+                <a:ea typeface="나눔고딕코딩" pitchFamily="34" charset="-122"/>
+                <a:cs typeface="나눔고딕코딩" pitchFamily="34" charset="-120"/>
               </a:rPr>
               <a:t>## 2. 이미지 (Images)</a:t>
             </a:r>
@@ -32701,9 +32701,9 @@
                 <a:solidFill>
                   <a:srgbClr val="94A3B8"/>
                 </a:solidFill>
-                <a:latin typeface="Nanum Gothic Coding" pitchFamily="34" charset="0"/>
-                <a:ea typeface="Nanum Gothic Coding" pitchFamily="34" charset="-122"/>
-                <a:cs typeface="Nanum Gothic Coding" pitchFamily="34" charset="-120"/>
+                <a:latin typeface="나눔고딕코딩" pitchFamily="34" charset="0"/>
+                <a:ea typeface="나눔고딕코딩" pitchFamily="34" charset="-122"/>
+                <a:cs typeface="나눔고딕코딩" pitchFamily="34" charset="-120"/>
               </a:rPr>
               <a:t>6</a:t>
             </a:r>
@@ -32740,9 +32740,9 @@
                 <a:solidFill>
                   <a:srgbClr val="CBD5E1"/>
                 </a:solidFill>
-                <a:latin typeface="Nanum Gothic Coding" pitchFamily="34" charset="0"/>
-                <a:ea typeface="Nanum Gothic Coding" pitchFamily="34" charset="-122"/>
-                <a:cs typeface="Nanum Gothic Coding" pitchFamily="34" charset="-120"/>
+                <a:latin typeface="나눔고딕코딩" pitchFamily="34" charset="0"/>
+                <a:ea typeface="나눔고딕코딩" pitchFamily="34" charset="-122"/>
+                <a:cs typeface="나눔고딕코딩" pitchFamily="34" charset="-120"/>
               </a:rPr>
               <a:t>&lt;!-- ![대체텍스트](이미지경로) --&gt;</a:t>
             </a:r>
@@ -32779,9 +32779,9 @@
                 <a:solidFill>
                   <a:srgbClr val="94A3B8"/>
                 </a:solidFill>
-                <a:latin typeface="Nanum Gothic Coding" pitchFamily="34" charset="0"/>
-                <a:ea typeface="Nanum Gothic Coding" pitchFamily="34" charset="-122"/>
-                <a:cs typeface="Nanum Gothic Coding" pitchFamily="34" charset="-120"/>
+                <a:latin typeface="나눔고딕코딩" pitchFamily="34" charset="0"/>
+                <a:ea typeface="나눔고딕코딩" pitchFamily="34" charset="-122"/>
+                <a:cs typeface="나눔고딕코딩" pitchFamily="34" charset="-120"/>
               </a:rPr>
               <a:t>7</a:t>
             </a:r>
@@ -32818,9 +32818,9 @@
                 <a:solidFill>
                   <a:srgbClr val="FBBF24"/>
                 </a:solidFill>
-                <a:latin typeface="Nanum Gothic Coding" pitchFamily="34" charset="0"/>
-                <a:ea typeface="Nanum Gothic Coding" pitchFamily="34" charset="-122"/>
-                <a:cs typeface="Nanum Gothic Coding" pitchFamily="34" charset="-120"/>
+                <a:latin typeface="나눔고딕코딩" pitchFamily="34" charset="0"/>
+                <a:ea typeface="나눔고딕코딩" pitchFamily="34" charset="-122"/>
+                <a:cs typeface="나눔고딕코딩" pitchFamily="34" charset="-120"/>
               </a:rPr>
               <a:t>![로고 이미지]</a:t>
             </a:r>
@@ -32857,9 +32857,9 @@
                 <a:solidFill>
                   <a:srgbClr val="CBD5E1"/>
                 </a:solidFill>
-                <a:latin typeface="Nanum Gothic Coding" pitchFamily="34" charset="0"/>
-                <a:ea typeface="Nanum Gothic Coding" pitchFamily="34" charset="-122"/>
-                <a:cs typeface="Nanum Gothic Coding" pitchFamily="34" charset="-120"/>
+                <a:latin typeface="나눔고딕코딩" pitchFamily="34" charset="0"/>
+                <a:ea typeface="나눔고딕코딩" pitchFamily="34" charset="-122"/>
+                <a:cs typeface="나눔고딕코딩" pitchFamily="34" charset="-120"/>
               </a:rPr>
               <a:t>(/assets/logo.png)</a:t>
             </a:r>
@@ -32896,9 +32896,9 @@
                 <a:solidFill>
                   <a:srgbClr val="94A3B8"/>
                 </a:solidFill>
-                <a:latin typeface="Nanum Gothic Coding" pitchFamily="34" charset="0"/>
-                <a:ea typeface="Nanum Gothic Coding" pitchFamily="34" charset="-122"/>
-                <a:cs typeface="Nanum Gothic Coding" pitchFamily="34" charset="-120"/>
+                <a:latin typeface="나눔고딕코딩" pitchFamily="34" charset="0"/>
+                <a:ea typeface="나눔고딕코딩" pitchFamily="34" charset="-122"/>
+                <a:cs typeface="나눔고딕코딩" pitchFamily="34" charset="-120"/>
               </a:rPr>
               <a:t>8</a:t>
             </a:r>
@@ -32935,9 +32935,9 @@
                 <a:solidFill>
                   <a:srgbClr val="94A3B8"/>
                 </a:solidFill>
-                <a:latin typeface="Nanum Gothic Coding" pitchFamily="34" charset="0"/>
-                <a:ea typeface="Nanum Gothic Coding" pitchFamily="34" charset="-122"/>
-                <a:cs typeface="Nanum Gothic Coding" pitchFamily="34" charset="-120"/>
+                <a:latin typeface="나눔고딕코딩" pitchFamily="34" charset="0"/>
+                <a:ea typeface="나눔고딕코딩" pitchFamily="34" charset="-122"/>
+                <a:cs typeface="나눔고딕코딩" pitchFamily="34" charset="-120"/>
               </a:rPr>
               <a:t>9</a:t>
             </a:r>
@@ -32974,9 +32974,9 @@
                 <a:solidFill>
                   <a:srgbClr val="38BDF8"/>
                 </a:solidFill>
-                <a:latin typeface="Nanum Gothic Coding" pitchFamily="34" charset="0"/>
-                <a:ea typeface="Nanum Gothic Coding" pitchFamily="34" charset="-122"/>
-                <a:cs typeface="Nanum Gothic Coding" pitchFamily="34" charset="-120"/>
+                <a:latin typeface="나눔고딕코딩" pitchFamily="34" charset="0"/>
+                <a:ea typeface="나눔고딕코딩" pitchFamily="34" charset="-122"/>
+                <a:cs typeface="나눔고딕코딩" pitchFamily="34" charset="-120"/>
               </a:rPr>
               <a:t>## 3. 코드 블록 (Fenced Code)</a:t>
             </a:r>
@@ -33013,9 +33013,9 @@
                 <a:solidFill>
                   <a:srgbClr val="94A3B8"/>
                 </a:solidFill>
-                <a:latin typeface="Nanum Gothic Coding" pitchFamily="34" charset="0"/>
-                <a:ea typeface="Nanum Gothic Coding" pitchFamily="34" charset="-122"/>
-                <a:cs typeface="Nanum Gothic Coding" pitchFamily="34" charset="-120"/>
+                <a:latin typeface="나눔고딕코딩" pitchFamily="34" charset="0"/>
+                <a:ea typeface="나눔고딕코딩" pitchFamily="34" charset="-122"/>
+                <a:cs typeface="나눔고딕코딩" pitchFamily="34" charset="-120"/>
               </a:rPr>
               <a:t>10</a:t>
             </a:r>
@@ -33052,9 +33052,9 @@
                 <a:solidFill>
                   <a:srgbClr val="A5B4FC"/>
                 </a:solidFill>
-                <a:latin typeface="Nanum Gothic Coding" pitchFamily="34" charset="0"/>
-                <a:ea typeface="Nanum Gothic Coding" pitchFamily="34" charset="-122"/>
-                <a:cs typeface="Nanum Gothic Coding" pitchFamily="34" charset="-120"/>
+                <a:latin typeface="나눔고딕코딩" pitchFamily="34" charset="0"/>
+                <a:ea typeface="나눔고딕코딩" pitchFamily="34" charset="-122"/>
+                <a:cs typeface="나눔고딕코딩" pitchFamily="34" charset="-120"/>
               </a:rPr>
               <a:t>```python</a:t>
             </a:r>
@@ -33091,9 +33091,9 @@
                 <a:solidFill>
                   <a:srgbClr val="94A3B8"/>
                 </a:solidFill>
-                <a:latin typeface="Nanum Gothic Coding" pitchFamily="34" charset="0"/>
-                <a:ea typeface="Nanum Gothic Coding" pitchFamily="34" charset="-122"/>
-                <a:cs typeface="Nanum Gothic Coding" pitchFamily="34" charset="-120"/>
+                <a:latin typeface="나눔고딕코딩" pitchFamily="34" charset="0"/>
+                <a:ea typeface="나눔고딕코딩" pitchFamily="34" charset="-122"/>
+                <a:cs typeface="나눔고딕코딩" pitchFamily="34" charset="-120"/>
               </a:rPr>
               <a:t>11</a:t>
             </a:r>
@@ -33130,9 +33130,9 @@
                 <a:solidFill>
                   <a:srgbClr val="E2E8F0"/>
                 </a:solidFill>
-                <a:latin typeface="Nanum Gothic Coding" pitchFamily="34" charset="0"/>
-                <a:ea typeface="Nanum Gothic Coding" pitchFamily="34" charset="-122"/>
-                <a:cs typeface="Nanum Gothic Coding" pitchFamily="34" charset="-120"/>
+                <a:latin typeface="나눔고딕코딩" pitchFamily="34" charset="0"/>
+                <a:ea typeface="나눔고딕코딩" pitchFamily="34" charset="-122"/>
+                <a:cs typeface="나눔고딕코딩" pitchFamily="34" charset="-120"/>
               </a:rPr>
               <a:t>def</a:t>
             </a:r>
@@ -33169,9 +33169,9 @@
                 <a:solidFill>
                   <a:srgbClr val="FCD34D"/>
                 </a:solidFill>
-                <a:latin typeface="Nanum Gothic Coding" pitchFamily="34" charset="0"/>
-                <a:ea typeface="Nanum Gothic Coding" pitchFamily="34" charset="-122"/>
-                <a:cs typeface="Nanum Gothic Coding" pitchFamily="34" charset="-120"/>
+                <a:latin typeface="나눔고딕코딩" pitchFamily="34" charset="0"/>
+                <a:ea typeface="나눔고딕코딩" pitchFamily="34" charset="-122"/>
+                <a:cs typeface="나눔고딕코딩" pitchFamily="34" charset="-120"/>
               </a:rPr>
               <a:t>hello</a:t>
             </a:r>
@@ -33208,9 +33208,9 @@
                 <a:solidFill>
                   <a:srgbClr val="E2E8F0"/>
                 </a:solidFill>
-                <a:latin typeface="Nanum Gothic Coding" pitchFamily="34" charset="0"/>
-                <a:ea typeface="Nanum Gothic Coding" pitchFamily="34" charset="-122"/>
-                <a:cs typeface="Nanum Gothic Coding" pitchFamily="34" charset="-120"/>
+                <a:latin typeface="나눔고딕코딩" pitchFamily="34" charset="0"/>
+                <a:ea typeface="나눔고딕코딩" pitchFamily="34" charset="-122"/>
+                <a:cs typeface="나눔고딕코딩" pitchFamily="34" charset="-120"/>
               </a:rPr>
               <a:t>():</a:t>
             </a:r>
@@ -33247,9 +33247,9 @@
                 <a:solidFill>
                   <a:srgbClr val="94A3B8"/>
                 </a:solidFill>
-                <a:latin typeface="Nanum Gothic Coding" pitchFamily="34" charset="0"/>
-                <a:ea typeface="Nanum Gothic Coding" pitchFamily="34" charset="-122"/>
-                <a:cs typeface="Nanum Gothic Coding" pitchFamily="34" charset="-120"/>
+                <a:latin typeface="나눔고딕코딩" pitchFamily="34" charset="0"/>
+                <a:ea typeface="나눔고딕코딩" pitchFamily="34" charset="-122"/>
+                <a:cs typeface="나눔고딕코딩" pitchFamily="34" charset="-120"/>
               </a:rPr>
               <a:t>12</a:t>
             </a:r>
@@ -33286,9 +33286,9 @@
                 <a:solidFill>
                   <a:srgbClr val="E2E8F0"/>
                 </a:solidFill>
-                <a:latin typeface="Nanum Gothic Coding" pitchFamily="34" charset="0"/>
-                <a:ea typeface="Nanum Gothic Coding" pitchFamily="34" charset="-122"/>
-                <a:cs typeface="Nanum Gothic Coding" pitchFamily="34" charset="-120"/>
+                <a:latin typeface="나눔고딕코딩" pitchFamily="34" charset="0"/>
+                <a:ea typeface="나눔고딕코딩" pitchFamily="34" charset="-122"/>
+                <a:cs typeface="나눔고딕코딩" pitchFamily="34" charset="-120"/>
               </a:rPr>
               <a:t>print(</a:t>
             </a:r>
@@ -33325,9 +33325,9 @@
                 <a:solidFill>
                   <a:srgbClr val="4ADE80"/>
                 </a:solidFill>
-                <a:latin typeface="Nanum Gothic Coding" pitchFamily="34" charset="0"/>
-                <a:ea typeface="Nanum Gothic Coding" pitchFamily="34" charset="-122"/>
-                <a:cs typeface="Nanum Gothic Coding" pitchFamily="34" charset="-120"/>
+                <a:latin typeface="나눔고딕코딩" pitchFamily="34" charset="0"/>
+                <a:ea typeface="나눔고딕코딩" pitchFamily="34" charset="-122"/>
+                <a:cs typeface="나눔고딕코딩" pitchFamily="34" charset="-120"/>
               </a:rPr>
               <a:t>"Hello Markdown!"</a:t>
             </a:r>
@@ -33364,9 +33364,9 @@
                 <a:solidFill>
                   <a:srgbClr val="E2E8F0"/>
                 </a:solidFill>
-                <a:latin typeface="Nanum Gothic Coding" pitchFamily="34" charset="0"/>
-                <a:ea typeface="Nanum Gothic Coding" pitchFamily="34" charset="-122"/>
-                <a:cs typeface="Nanum Gothic Coding" pitchFamily="34" charset="-120"/>
+                <a:latin typeface="나눔고딕코딩" pitchFamily="34" charset="0"/>
+                <a:ea typeface="나눔고딕코딩" pitchFamily="34" charset="-122"/>
+                <a:cs typeface="나눔고딕코딩" pitchFamily="34" charset="-120"/>
               </a:rPr>
               <a:t>)</a:t>
             </a:r>
@@ -33403,9 +33403,9 @@
                 <a:solidFill>
                   <a:srgbClr val="94A3B8"/>
                 </a:solidFill>
-                <a:latin typeface="Nanum Gothic Coding" pitchFamily="34" charset="0"/>
-                <a:ea typeface="Nanum Gothic Coding" pitchFamily="34" charset="-122"/>
-                <a:cs typeface="Nanum Gothic Coding" pitchFamily="34" charset="-120"/>
+                <a:latin typeface="나눔고딕코딩" pitchFamily="34" charset="0"/>
+                <a:ea typeface="나눔고딕코딩" pitchFamily="34" charset="-122"/>
+                <a:cs typeface="나눔고딕코딩" pitchFamily="34" charset="-120"/>
               </a:rPr>
               <a:t>13</a:t>
             </a:r>
@@ -33442,9 +33442,9 @@
                 <a:solidFill>
                   <a:srgbClr val="A5B4FC"/>
                 </a:solidFill>
-                <a:latin typeface="Nanum Gothic Coding" pitchFamily="34" charset="0"/>
-                <a:ea typeface="Nanum Gothic Coding" pitchFamily="34" charset="-122"/>
-                <a:cs typeface="Nanum Gothic Coding" pitchFamily="34" charset="-120"/>
+                <a:latin typeface="나눔고딕코딩" pitchFamily="34" charset="0"/>
+                <a:ea typeface="나눔고딕코딩" pitchFamily="34" charset="-122"/>
+                <a:cs typeface="나눔고딕코딩" pitchFamily="34" charset="-120"/>
               </a:rPr>
               <a:t>```</a:t>
             </a:r>
@@ -33481,9 +33481,9 @@
                 <a:solidFill>
                   <a:srgbClr val="94A3B8"/>
                 </a:solidFill>
-                <a:latin typeface="Nanum Gothic Coding" pitchFamily="34" charset="0"/>
-                <a:ea typeface="Nanum Gothic Coding" pitchFamily="34" charset="-122"/>
-                <a:cs typeface="Nanum Gothic Coding" pitchFamily="34" charset="-120"/>
+                <a:latin typeface="나눔고딕코딩" pitchFamily="34" charset="0"/>
+                <a:ea typeface="나눔고딕코딩" pitchFamily="34" charset="-122"/>
+                <a:cs typeface="나눔고딕코딩" pitchFamily="34" charset="-120"/>
               </a:rPr>
               <a:t>14</a:t>
             </a:r>
@@ -33520,9 +33520,9 @@
                 <a:solidFill>
                   <a:srgbClr val="94A3B8"/>
                 </a:solidFill>
-                <a:latin typeface="Nanum Gothic Coding" pitchFamily="34" charset="0"/>
-                <a:ea typeface="Nanum Gothic Coding" pitchFamily="34" charset="-122"/>
-                <a:cs typeface="Nanum Gothic Coding" pitchFamily="34" charset="-120"/>
+                <a:latin typeface="나눔고딕코딩" pitchFamily="34" charset="0"/>
+                <a:ea typeface="나눔고딕코딩" pitchFamily="34" charset="-122"/>
+                <a:cs typeface="나눔고딕코딩" pitchFamily="34" charset="-120"/>
               </a:rPr>
               <a:t>15</a:t>
             </a:r>
@@ -33559,9 +33559,9 @@
                 <a:solidFill>
                   <a:srgbClr val="CBD5E1"/>
                 </a:solidFill>
-                <a:latin typeface="Nanum Gothic Coding" pitchFamily="34" charset="0"/>
-                <a:ea typeface="Nanum Gothic Coding" pitchFamily="34" charset="-122"/>
-                <a:cs typeface="Nanum Gothic Coding" pitchFamily="34" charset="-120"/>
+                <a:latin typeface="나눔고딕코딩" pitchFamily="34" charset="0"/>
+                <a:ea typeface="나눔고딕코딩" pitchFamily="34" charset="-122"/>
+                <a:cs typeface="나눔고딕코딩" pitchFamily="34" charset="-120"/>
               </a:rPr>
               <a:t>&lt;!-- 인라인 코드는 `백틱` 하나만 사용 --&gt;</a:t>
             </a:r>
